--- a/TRINETRA_Deck_Soft.pptx
+++ b/TRINETRA_Deck_Soft.pptx
@@ -15,9 +15,10 @@
     <p:sldId id="263" r:id="rId9"/>
     <p:sldId id="264" r:id="rId10"/>
     <p:sldId id="265" r:id="rId11"/>
+    <p:sldId id="266" r:id="rId12"/>
   </p:sldIdLst>
   <p:notesMasterIdLst>
-    <p:notesMasterId r:id="rId12"/>
+    <p:notesMasterId r:id="rId13"/>
   </p:notesMasterIdLst>
   <p:sldSz cx="12161520" cy="6858000"/>
   <p:notesSz cx="6858000" cy="12161520"/>
@@ -623,6 +624,94 @@
             <a:fld id="{F7021451-1387-4CA6-816F-3879F97B5CBC}" type="slidenum">
               <a:rPr lang="en-US"/>
               <a:t>10</a:t>
+            </a:fld>
+            <a:endParaRPr lang="en-US"/>
+          </a:p>
+        </p:txBody>
+      </p:sp>
+    </p:spTree>
+    <p:extLst>
+      <p:ext uri="{BB962C8B-B14F-4D97-AF65-F5344CB8AC3E}">
+        <p14:creationId xmlns:p14="http://schemas.microsoft.com/office/powerpoint/2010/main" val="1024086991"/>
+      </p:ext>
+    </p:extLst>
+  </p:cSld>
+  <p:clrMapOvr>
+    <a:masterClrMapping/>
+  </p:clrMapOvr>
+</p:notes>
+</file>
+
+<file path=ppt/notesSlides/notesSlide11.xml><?xml version="1.0" encoding="utf-8"?>
+<p:notes xmlns:a="http://schemas.openxmlformats.org/drawingml/2006/main" xmlns:r="http://schemas.openxmlformats.org/officeDocument/2006/relationships" xmlns:p="http://schemas.openxmlformats.org/presentationml/2006/main">
+  <p:cSld>
+    <p:spTree>
+      <p:nvGrpSpPr>
+        <p:cNvPr id="1" name=""/>
+        <p:cNvGrpSpPr/>
+        <p:nvPr/>
+      </p:nvGrpSpPr>
+      <p:grpSpPr>
+        <a:xfrm>
+          <a:off x="0" y="0"/>
+          <a:ext cx="0" cy="0"/>
+          <a:chOff x="0" y="0"/>
+          <a:chExt cx="0" cy="0"/>
+        </a:xfrm>
+      </p:grpSpPr>
+      <p:sp>
+        <p:nvSpPr>
+          <p:cNvPr id="2" name="Slide Image Placeholder 1"/>
+          <p:cNvSpPr>
+            <a:spLocks noGrp="1" noRot="1" noChangeAspect="1"/>
+          </p:cNvSpPr>
+          <p:nvPr>
+            <p:ph type="sldImg"/>
+          </p:nvPr>
+        </p:nvSpPr>
+        <p:spPr/>
+      </p:sp>
+      <p:sp>
+        <p:nvSpPr>
+          <p:cNvPr id="3" name="Notes Placeholder 2"/>
+          <p:cNvSpPr>
+            <a:spLocks noGrp="1"/>
+          </p:cNvSpPr>
+          <p:nvPr>
+            <p:ph type="body" idx="1"/>
+          </p:nvPr>
+        </p:nvSpPr>
+        <p:spPr/>
+        <p:txBody>
+          <a:bodyPr/>
+          <a:lstStyle/>
+          <a:p>
+            <a:r>
+              <a:rPr lang="en-US" dirty="0"/>
+              <a:t/>
+            </a:r>
+            <a:endParaRPr lang="en-US" dirty="0"/>
+          </a:p>
+        </p:txBody>
+      </p:sp>
+      <p:sp>
+        <p:nvSpPr>
+          <p:cNvPr id="4" name="Slide Number Placeholder 3"/>
+          <p:cNvSpPr>
+            <a:spLocks noGrp="1"/>
+          </p:cNvSpPr>
+          <p:nvPr>
+            <p:ph type="sldNum" sz="quarter" idx="10"/>
+          </p:nvPr>
+        </p:nvSpPr>
+        <p:spPr/>
+        <p:txBody>
+          <a:bodyPr/>
+          <a:lstStyle/>
+          <a:p>
+            <a:fld id="{F7021451-1387-4CA6-816F-3879F97B5CBC}" type="slidenum">
+              <a:rPr lang="en-US"/>
+              <a:t>11</a:t>
             </a:fld>
             <a:endParaRPr lang="en-US"/>
           </a:p>
@@ -1811,7 +1900,7 @@
         <p:spPr>
           <a:xfrm>
             <a:off x="658368" y="2286000"/>
-            <a:ext cx="7863840" cy="640080"/>
+            <a:ext cx="7863840" cy="548640"/>
           </a:xfrm>
           <a:prstGeom prst="rect">
             <a:avLst/>
@@ -1849,8 +1938,8 @@
         </p:nvSpPr>
         <p:spPr>
           <a:xfrm>
-            <a:off x="658368" y="3108960"/>
-            <a:ext cx="7589520" cy="914400"/>
+            <a:off x="658368" y="2999232"/>
+            <a:ext cx="7680960" cy="914400"/>
           </a:xfrm>
           <a:prstGeom prst="rect">
             <a:avLst/>
@@ -1864,7 +1953,7 @@
           <a:p>
             <a:pPr algn="l" indent="0" marL="0">
               <a:lnSpc>
-                <a:spcPct val="125000"/>
+                <a:spcPct val="130000"/>
               </a:lnSpc>
               <a:buNone/>
             </a:pPr>
@@ -1877,7 +1966,7 @@
                 <a:ea typeface="Helvetica Neue" pitchFamily="34" charset="-122"/>
                 <a:cs typeface="Helvetica Neue" pitchFamily="34" charset="-120"/>
               </a:rPr>
-              <a:t>Governed crude-supply decisions at machine speed. It proposes, a machine—not a model—enforces the rules, and every step is on the record.</a:t>
+              <a:t>AI for sense-making and constitutional auditing · deterministic logic for scoring · humans for final approval. Every step hash-chained, byte-identical, offline.</a:t>
             </a:r>
             <a:endParaRPr lang="en-US" sz="1400" dirty="0"/>
           </a:p>
@@ -2590,6 +2679,446 @@
         </p:nvSpPr>
         <p:spPr>
           <a:xfrm>
+            <a:off x="0" y="0"/>
+            <a:ext cx="12161520" cy="109728"/>
+          </a:xfrm>
+          <a:prstGeom prst="rect">
+            <a:avLst/>
+          </a:prstGeom>
+          <a:solidFill>
+            <a:srgbClr val="D9A441"/>
+          </a:solidFill>
+          <a:ln/>
+        </p:spPr>
+      </p:sp>
+      <p:sp>
+        <p:nvSpPr>
+          <p:cNvPr id="4" name="Text 2"/>
+          <p:cNvSpPr/>
+          <p:nvPr/>
+        </p:nvSpPr>
+        <p:spPr>
+          <a:xfrm>
+            <a:off x="640080" y="1600200"/>
+            <a:ext cx="6949440" cy="777240"/>
+          </a:xfrm>
+          <a:prstGeom prst="rect">
+            <a:avLst/>
+          </a:prstGeom>
+          <a:noFill/>
+          <a:ln/>
+        </p:spPr>
+        <p:txBody>
+          <a:bodyPr wrap="square" lIns="0" tIns="0" rIns="0" bIns="0" rtlCol="0" anchor="ctr"/>
+          <a:lstStyle/>
+          <a:p>
+            <a:pPr algn="l" indent="0" marL="0">
+              <a:buNone/>
+            </a:pPr>
+            <a:r>
+              <a:rPr lang="en-US" sz="3600" b="1" dirty="0">
+                <a:solidFill>
+                  <a:srgbClr val="D9DEE6"/>
+                </a:solidFill>
+                <a:latin typeface="Helvetica Neue" pitchFamily="34" charset="0"/>
+                <a:ea typeface="Helvetica Neue" pitchFamily="34" charset="-122"/>
+                <a:cs typeface="Helvetica Neue" pitchFamily="34" charset="-120"/>
+              </a:rPr>
+              <a:t>Six days to four minutes.</a:t>
+            </a:r>
+            <a:endParaRPr lang="en-US" sz="3600" dirty="0"/>
+          </a:p>
+        </p:txBody>
+      </p:sp>
+      <p:sp>
+        <p:nvSpPr>
+          <p:cNvPr id="5" name="Text 3"/>
+          <p:cNvSpPr/>
+          <p:nvPr/>
+        </p:nvSpPr>
+        <p:spPr>
+          <a:xfrm>
+            <a:off x="640080" y="2450592"/>
+            <a:ext cx="7040880" cy="640080"/>
+          </a:xfrm>
+          <a:prstGeom prst="rect">
+            <a:avLst/>
+          </a:prstGeom>
+          <a:noFill/>
+          <a:ln/>
+        </p:spPr>
+        <p:txBody>
+          <a:bodyPr wrap="square" lIns="0" tIns="0" rIns="0" bIns="0" rtlCol="0" anchor="ctr"/>
+          <a:lstStyle/>
+          <a:p>
+            <a:pPr algn="l" indent="0" marL="0">
+              <a:buNone/>
+            </a:pPr>
+            <a:r>
+              <a:rPr lang="en-US" sz="2600" b="1" dirty="0">
+                <a:solidFill>
+                  <a:srgbClr val="ECC069"/>
+                </a:solidFill>
+                <a:latin typeface="Helvetica Neue" pitchFamily="34" charset="0"/>
+                <a:ea typeface="Helvetica Neue" pitchFamily="34" charset="-122"/>
+                <a:cs typeface="Helvetica Neue" pitchFamily="34" charset="-120"/>
+              </a:rPr>
+              <a:t>And the argument is on the record.</a:t>
+            </a:r>
+            <a:endParaRPr lang="en-US" sz="2600" dirty="0"/>
+          </a:p>
+        </p:txBody>
+      </p:sp>
+      <p:sp>
+        <p:nvSpPr>
+          <p:cNvPr id="6" name="Text 4"/>
+          <p:cNvSpPr/>
+          <p:nvPr/>
+        </p:nvSpPr>
+        <p:spPr>
+          <a:xfrm>
+            <a:off x="658368" y="3337560"/>
+            <a:ext cx="6858000" cy="914400"/>
+          </a:xfrm>
+          <a:prstGeom prst="rect">
+            <a:avLst/>
+          </a:prstGeom>
+          <a:noFill/>
+          <a:ln/>
+        </p:spPr>
+        <p:txBody>
+          <a:bodyPr wrap="square" lIns="0" tIns="0" rIns="0" bIns="0" rtlCol="0" anchor="t"/>
+          <a:lstStyle/>
+          <a:p>
+            <a:pPr algn="l" indent="0" marL="0">
+              <a:lnSpc>
+                <a:spcPct val="135000"/>
+              </a:lnSpc>
+              <a:buNone/>
+            </a:pPr>
+            <a:r>
+              <a:rPr lang="en-US" sz="1500" dirty="0">
+                <a:solidFill>
+                  <a:srgbClr val="8A93A0"/>
+                </a:solidFill>
+                <a:latin typeface="Helvetica Neue" pitchFamily="34" charset="0"/>
+                <a:ea typeface="Helvetica Neue" pitchFamily="34" charset="-122"/>
+                <a:cs typeface="Helvetica Neue" pitchFamily="34" charset="-120"/>
+              </a:rPr>
+              <a:t>An AI that argues under rules you wrote. A machine — not a model — that enforces them. A decision you can audit.</a:t>
+            </a:r>
+            <a:endParaRPr lang="en-US" sz="1500" dirty="0"/>
+          </a:p>
+        </p:txBody>
+      </p:sp>
+      <p:sp>
+        <p:nvSpPr>
+          <p:cNvPr id="7" name="Shape 5"/>
+          <p:cNvSpPr/>
+          <p:nvPr/>
+        </p:nvSpPr>
+        <p:spPr>
+          <a:xfrm>
+            <a:off x="7955280" y="1737360"/>
+            <a:ext cx="3657600" cy="2344783"/>
+          </a:xfrm>
+          <a:prstGeom prst="rect">
+            <a:avLst/>
+          </a:prstGeom>
+          <a:solidFill>
+            <a:srgbClr val="000000"/>
+          </a:solidFill>
+          <a:ln/>
+          <a:effectLst>
+            <a:outerShdw sx="100000" sy="100000" kx="0" ky="0" algn="bl" rotWithShape="0" blurRad="127000" dist="38100" dir="8100000">
+              <a:srgbClr val="000000">
+                <a:alpha val="45000"/>
+              </a:srgbClr>
+            </a:outerShdw>
+          </a:effectLst>
+        </p:spPr>
+      </p:sp>
+      <p:pic>
+        <p:nvPicPr>
+          <p:cNvPr id="8" name="Image 0" descr="/private/tmp/claude-501/-Users-aman-Downloads-ET-Hackathon/ab60fbe1-6f03-48e5-aa7b-8b187ce1082a/scratchpad/deck-assets/charter_after.png">    </p:cNvPr>
+          <p:cNvPicPr>
+            <a:picLocks noChangeAspect="1"/>
+          </p:cNvPicPr>
+          <p:nvPr/>
+        </p:nvPicPr>
+        <p:blipFill>
+          <a:blip r:embed="rId1"/>
+          <a:stretch>
+            <a:fillRect/>
+          </a:stretch>
+        </p:blipFill>
+        <p:spPr>
+          <a:xfrm>
+            <a:off x="7955280" y="1737360"/>
+            <a:ext cx="3657600" cy="2344783"/>
+          </a:xfrm>
+          <a:prstGeom prst="rect">
+            <a:avLst/>
+          </a:prstGeom>
+        </p:spPr>
+      </p:pic>
+      <p:sp>
+        <p:nvSpPr>
+          <p:cNvPr id="9" name="Shape 6"/>
+          <p:cNvSpPr/>
+          <p:nvPr/>
+        </p:nvSpPr>
+        <p:spPr>
+          <a:xfrm>
+            <a:off x="7955280" y="1737360"/>
+            <a:ext cx="3657600" cy="2344783"/>
+          </a:xfrm>
+          <a:prstGeom prst="rect">
+            <a:avLst/>
+          </a:prstGeom>
+          <a:ln w="12700">
+            <a:solidFill>
+              <a:srgbClr val="3A4552"/>
+            </a:solidFill>
+            <a:prstDash val="solid"/>
+          </a:ln>
+        </p:spPr>
+      </p:sp>
+      <p:sp>
+        <p:nvSpPr>
+          <p:cNvPr id="10" name="Text 7"/>
+          <p:cNvSpPr/>
+          <p:nvPr/>
+        </p:nvSpPr>
+        <p:spPr>
+          <a:xfrm>
+            <a:off x="7955280" y="4155295"/>
+            <a:ext cx="3657600" cy="365760"/>
+          </a:xfrm>
+          <a:prstGeom prst="rect">
+            <a:avLst/>
+          </a:prstGeom>
+          <a:noFill/>
+          <a:ln/>
+        </p:spPr>
+        <p:txBody>
+          <a:bodyPr wrap="square" lIns="0" tIns="0" rIns="0" bIns="0" rtlCol="0" anchor="t"/>
+          <a:lstStyle/>
+          <a:p>
+            <a:pPr algn="ctr" indent="0" marL="0">
+              <a:buNone/>
+            </a:pPr>
+            <a:r>
+              <a:rPr lang="en-US" sz="1000" i="1" dirty="0">
+                <a:solidFill>
+                  <a:srgbClr val="8A93A0"/>
+                </a:solidFill>
+                <a:latin typeface="Helvetica Neue" pitchFamily="34" charset="0"/>
+                <a:ea typeface="Helvetica Neue" pitchFamily="34" charset="-122"/>
+                <a:cs typeface="Helvetica Neue" pitchFamily="34" charset="-120"/>
+              </a:rPr>
+              <a:t>the signed audit trace — hash-chained, VERIFIED, one-click printable</a:t>
+            </a:r>
+            <a:endParaRPr lang="en-US" sz="1000" dirty="0"/>
+          </a:p>
+        </p:txBody>
+      </p:sp>
+      <p:sp>
+        <p:nvSpPr>
+          <p:cNvPr id="11" name="Shape 8"/>
+          <p:cNvSpPr/>
+          <p:nvPr/>
+        </p:nvSpPr>
+        <p:spPr>
+          <a:xfrm>
+            <a:off x="640080" y="4572000"/>
+            <a:ext cx="7040880" cy="914400"/>
+          </a:xfrm>
+          <a:prstGeom prst="rect">
+            <a:avLst/>
+          </a:prstGeom>
+          <a:solidFill>
+            <a:srgbClr val="232B37"/>
+          </a:solidFill>
+          <a:ln w="12700">
+            <a:solidFill>
+              <a:srgbClr val="3A4552"/>
+            </a:solidFill>
+            <a:prstDash val="solid"/>
+          </a:ln>
+        </p:spPr>
+      </p:sp>
+      <p:sp>
+        <p:nvSpPr>
+          <p:cNvPr id="12" name="Text 9"/>
+          <p:cNvSpPr/>
+          <p:nvPr/>
+        </p:nvSpPr>
+        <p:spPr>
+          <a:xfrm>
+            <a:off x="868680" y="4572000"/>
+            <a:ext cx="6583680" cy="914400"/>
+          </a:xfrm>
+          <a:prstGeom prst="rect">
+            <a:avLst/>
+          </a:prstGeom>
+          <a:noFill/>
+          <a:ln/>
+        </p:spPr>
+        <p:txBody>
+          <a:bodyPr wrap="square" lIns="0" tIns="0" rIns="0" bIns="0" rtlCol="0" anchor="ctr"/>
+          <a:lstStyle/>
+          <a:p>
+            <a:pPr algn="l" indent="0" marL="0">
+              <a:buNone/>
+            </a:pPr>
+            <a:r>
+              <a:rPr lang="en-US" sz="1500" b="1" dirty="0">
+                <a:solidFill>
+                  <a:srgbClr val="8A93A0"/>
+                </a:solidFill>
+                <a:latin typeface="Helvetica Neue" pitchFamily="34" charset="0"/>
+                <a:ea typeface="Helvetica Neue" pitchFamily="34" charset="-122"/>
+                <a:cs typeface="Helvetica Neue" pitchFamily="34" charset="-120"/>
+              </a:rPr>
+              <a:t>DEMO + REPO   </a:t>
+            </a:r>
+            <a:pPr algn="l" indent="0" marL="0">
+              <a:buNone/>
+            </a:pPr>
+            <a:r>
+              <a:rPr lang="en-US" sz="1500" b="1" dirty="0">
+                <a:solidFill>
+                  <a:srgbClr val="6BA0D8"/>
+                </a:solidFill>
+                <a:latin typeface="Helvetica Neue" pitchFamily="34" charset="0"/>
+                <a:ea typeface="Helvetica Neue" pitchFamily="34" charset="-122"/>
+                <a:cs typeface="Helvetica Neue" pitchFamily="34" charset="-120"/>
+              </a:rPr>
+              <a:t>github.com/banthia14aman/ET-Hackathon</a:t>
+            </a:r>
+            <a:endParaRPr lang="en-US" sz="1500" dirty="0"/>
+          </a:p>
+        </p:txBody>
+      </p:sp>
+      <p:sp>
+        <p:nvSpPr>
+          <p:cNvPr id="13" name="Text 10"/>
+          <p:cNvSpPr/>
+          <p:nvPr/>
+        </p:nvSpPr>
+        <p:spPr>
+          <a:xfrm>
+            <a:off x="640080" y="5852160"/>
+            <a:ext cx="6400800" cy="457200"/>
+          </a:xfrm>
+          <a:prstGeom prst="rect">
+            <a:avLst/>
+          </a:prstGeom>
+          <a:noFill/>
+          <a:ln/>
+        </p:spPr>
+        <p:txBody>
+          <a:bodyPr wrap="square" lIns="0" tIns="0" rIns="0" bIns="0" rtlCol="0" anchor="t"/>
+          <a:lstStyle/>
+          <a:p>
+            <a:pPr algn="l" indent="0" marL="0">
+              <a:buNone/>
+            </a:pPr>
+            <a:r>
+              <a:rPr lang="en-US" sz="2000" b="1" spc="300" kern="0" dirty="0">
+                <a:solidFill>
+                  <a:srgbClr val="D9A441"/>
+                </a:solidFill>
+                <a:latin typeface="Helvetica Neue" pitchFamily="34" charset="0"/>
+                <a:ea typeface="Helvetica Neue" pitchFamily="34" charset="-122"/>
+                <a:cs typeface="Helvetica Neue" pitchFamily="34" charset="-120"/>
+              </a:rPr>
+              <a:t>TRIN△ETRA</a:t>
+            </a:r>
+            <a:endParaRPr lang="en-US" sz="2000" dirty="0"/>
+          </a:p>
+        </p:txBody>
+      </p:sp>
+    </p:spTree>
+  </p:cSld>
+  <p:clrMapOvr>
+    <a:masterClrMapping/>
+  </p:clrMapOvr>
+</p:sld>
+</file>
+
+<file path=ppt/slides/slide11.xml><?xml version="1.0" encoding="utf-8"?>
+<p:sld xmlns:a="http://schemas.openxmlformats.org/drawingml/2006/main" xmlns:r="http://schemas.openxmlformats.org/officeDocument/2006/relationships" xmlns:p="http://schemas.openxmlformats.org/presentationml/2006/main">
+  <p:cSld name="Slide 11">
+    <p:bg>
+      <p:bgPr>
+        <a:solidFill>
+          <a:srgbClr val="1B212B"/>
+        </a:solidFill>
+      </p:bgPr>
+    </p:bg>
+    <p:spTree>
+      <p:nvGrpSpPr>
+        <p:cNvPr id="1" name=""/>
+        <p:cNvGrpSpPr/>
+        <p:nvPr/>
+      </p:nvGrpSpPr>
+      <p:grpSpPr>
+        <a:xfrm>
+          <a:off x="0" y="0"/>
+          <a:ext cx="0" cy="0"/>
+          <a:chOff x="0" y="0"/>
+          <a:chExt cx="0" cy="0"/>
+        </a:xfrm>
+      </p:grpSpPr>
+      <p:sp>
+        <p:nvSpPr>
+          <p:cNvPr id="2" name="Text 0"/>
+          <p:cNvSpPr/>
+          <p:nvPr/>
+        </p:nvSpPr>
+        <p:spPr>
+          <a:xfrm>
+            <a:off x="10195560" y="6473952"/>
+            <a:ext cx="1828800" cy="274320"/>
+          </a:xfrm>
+          <a:prstGeom prst="rect">
+            <a:avLst/>
+          </a:prstGeom>
+          <a:noFill/>
+          <a:ln/>
+        </p:spPr>
+        <p:txBody>
+          <a:bodyPr wrap="square" lIns="0" tIns="0" rIns="0" bIns="0" rtlCol="0" anchor="t"/>
+          <a:lstStyle/>
+          <a:p>
+            <a:pPr algn="r" indent="0" marL="0">
+              <a:buNone/>
+            </a:pPr>
+            <a:r>
+              <a:rPr lang="en-US" sz="900" spc="100" kern="0" dirty="0">
+                <a:solidFill>
+                  <a:srgbClr val="8A93A0"/>
+                </a:solidFill>
+                <a:latin typeface="Consolas" pitchFamily="34" charset="0"/>
+                <a:ea typeface="Consolas" pitchFamily="34" charset="-122"/>
+                <a:cs typeface="Consolas" pitchFamily="34" charset="-120"/>
+              </a:rPr>
+              <a:t>△ TRINETRA</a:t>
+            </a:r>
+            <a:endParaRPr lang="en-US" sz="900" dirty="0"/>
+          </a:p>
+        </p:txBody>
+      </p:sp>
+      <p:sp>
+        <p:nvSpPr>
+          <p:cNvPr id="3" name="Shape 1"/>
+          <p:cNvSpPr/>
+          <p:nvPr/>
+        </p:nvSpPr>
+        <p:spPr>
+          <a:xfrm>
             <a:off x="521208" y="484632"/>
             <a:ext cx="146304" cy="256032"/>
           </a:xfrm>
@@ -9170,7 +9699,7 @@
                 <a:ea typeface="Consolas" pitchFamily="34" charset="-122"/>
                 <a:cs typeface="Consolas" pitchFamily="34" charset="-120"/>
               </a:rPr>
-              <a:t>SCALE IS CONFIG, NOT CODE</a:t>
+              <a:t>AI FOR SENSE-MAKING  ·  RULES FOR SCORING  ·  HUMANS FOR APPROVAL</a:t>
             </a:r>
             <a:endParaRPr lang="en-US" sz="1200" dirty="0"/>
           </a:p>
@@ -9221,7 +9750,7 @@
               <a:buNone/>
             </a:pPr>
             <a:r>
-              <a:rPr lang="en-US" sz="2200" b="1" dirty="0">
+              <a:rPr lang="en-US" sz="2100" b="1" dirty="0">
                 <a:solidFill>
                   <a:srgbClr val="D9DEE6"/>
                 </a:solidFill>
@@ -9229,9 +9758,9 @@
                 <a:ea typeface="Helvetica Neue" pitchFamily="34" charset="-122"/>
                 <a:cs typeface="Helvetica Neue" pitchFamily="34" charset="-120"/>
               </a:rPr>
-              <a:t>One strait this week. Every chokepoint, every commodity, next.</a:t>
-            </a:r>
-            <a:endParaRPr lang="en-US" sz="2200" dirty="0"/>
+              <a:t>Now it reads messy operator text — and the gate throws out whatever it makes up.</a:t>
+            </a:r>
+            <a:endParaRPr lang="en-US" sz="2100" dirty="0"/>
           </a:p>
         </p:txBody>
       </p:sp>
@@ -9243,162 +9772,8 @@
         </p:nvSpPr>
         <p:spPr>
           <a:xfrm>
-            <a:off x="502920" y="1554480"/>
-            <a:ext cx="6949440" cy="4343400"/>
-          </a:xfrm>
-          <a:prstGeom prst="rect">
-            <a:avLst/>
-          </a:prstGeom>
-          <a:solidFill>
-            <a:srgbClr val="000000"/>
-          </a:solidFill>
-          <a:ln/>
-          <a:effectLst>
-            <a:outerShdw sx="100000" sy="100000" kx="0" ky="0" algn="bl" rotWithShape="0" blurRad="127000" dist="38100" dir="8100000">
-              <a:srgbClr val="000000">
-                <a:alpha val="45000"/>
-              </a:srgbClr>
-            </a:outerShdw>
-          </a:effectLst>
-        </p:spPr>
-      </p:sp>
-      <p:pic>
-        <p:nvPicPr>
-          <p:cNvPr id="8" name="Image 0" descr="/private/tmp/claude-501/-Users-aman-Downloads-ET-Hackathon/ab60fbe1-6f03-48e5-aa7b-8b187ce1082a/scratchpad/deck-assets/map.png">    </p:cNvPr>
-          <p:cNvPicPr>
-            <a:picLocks noChangeAspect="1"/>
-          </p:cNvPicPr>
-          <p:nvPr/>
-        </p:nvPicPr>
-        <p:blipFill>
-          <a:blip r:embed="rId1"/>
-          <a:stretch>
-            <a:fillRect/>
-          </a:stretch>
-        </p:blipFill>
-        <p:spPr>
-          <a:xfrm>
-            <a:off x="502920" y="1554480"/>
-            <a:ext cx="6949440" cy="4343400"/>
-          </a:xfrm>
-          <a:prstGeom prst="rect">
-            <a:avLst/>
-          </a:prstGeom>
-        </p:spPr>
-      </p:pic>
-      <p:sp>
-        <p:nvSpPr>
-          <p:cNvPr id="9" name="Shape 6"/>
-          <p:cNvSpPr/>
-          <p:nvPr/>
-        </p:nvSpPr>
-        <p:spPr>
-          <a:xfrm>
-            <a:off x="502920" y="1554480"/>
-            <a:ext cx="6949440" cy="4343400"/>
-          </a:xfrm>
-          <a:prstGeom prst="rect">
-            <a:avLst/>
-          </a:prstGeom>
-          <a:ln w="12700">
-            <a:solidFill>
-              <a:srgbClr val="3A4552"/>
-            </a:solidFill>
-            <a:prstDash val="solid"/>
-          </a:ln>
-        </p:spPr>
-      </p:sp>
-      <p:sp>
-        <p:nvSpPr>
-          <p:cNvPr id="10" name="Text 7"/>
-          <p:cNvSpPr/>
-          <p:nvPr/>
-        </p:nvSpPr>
-        <p:spPr>
-          <a:xfrm>
-            <a:off x="7680960" y="1572768"/>
-            <a:ext cx="3977640" cy="1005840"/>
-          </a:xfrm>
-          <a:prstGeom prst="rect">
-            <a:avLst/>
-          </a:prstGeom>
-          <a:noFill/>
-          <a:ln/>
-        </p:spPr>
-        <p:txBody>
-          <a:bodyPr wrap="square" lIns="0" tIns="0" rIns="0" bIns="0" rtlCol="0" anchor="t"/>
-          <a:lstStyle/>
-          <a:p>
-            <a:pPr algn="l" indent="0" marL="0">
-              <a:lnSpc>
-                <a:spcPct val="130000"/>
-              </a:lnSpc>
-              <a:buNone/>
-            </a:pPr>
-            <a:r>
-              <a:rPr lang="en-US" sz="1400" dirty="0">
-                <a:solidFill>
-                  <a:srgbClr val="D9DEE6"/>
-                </a:solidFill>
-                <a:latin typeface="Helvetica Neue" pitchFamily="34" charset="0"/>
-                <a:ea typeface="Helvetica Neue" pitchFamily="34" charset="-122"/>
-                <a:cs typeface="Helvetica Neue" pitchFamily="34" charset="-120"/>
-              </a:rPr>
-              <a:t>The engine is graph-agnostic. A new theatre — a new chokepoint, a new commodity — is a new data bundle, not new code.</a:t>
-            </a:r>
-            <a:endParaRPr lang="en-US" sz="1400" dirty="0"/>
-          </a:p>
-        </p:txBody>
-      </p:sp>
-      <p:sp>
-        <p:nvSpPr>
-          <p:cNvPr id="11" name="Text 8"/>
-          <p:cNvSpPr/>
-          <p:nvPr/>
-        </p:nvSpPr>
-        <p:spPr>
-          <a:xfrm>
-            <a:off x="7680960" y="2743200"/>
-            <a:ext cx="3977640" cy="274320"/>
-          </a:xfrm>
-          <a:prstGeom prst="rect">
-            <a:avLst/>
-          </a:prstGeom>
-          <a:noFill/>
-          <a:ln/>
-        </p:spPr>
-        <p:txBody>
-          <a:bodyPr wrap="square" lIns="0" tIns="0" rIns="0" bIns="0" rtlCol="0" anchor="t"/>
-          <a:lstStyle/>
-          <a:p>
-            <a:pPr algn="l" indent="0" marL="0">
-              <a:buNone/>
-            </a:pPr>
-            <a:r>
-              <a:rPr lang="en-US" sz="1100" b="1" spc="100" kern="0" dirty="0">
-                <a:solidFill>
-                  <a:srgbClr val="D9A441"/>
-                </a:solidFill>
-                <a:latin typeface="Helvetica Neue" pitchFamily="34" charset="0"/>
-                <a:ea typeface="Helvetica Neue" pitchFamily="34" charset="-122"/>
-                <a:cs typeface="Helvetica Neue" pitchFamily="34" charset="-120"/>
-              </a:rPr>
-              <a:t>THE BUYER LADDER</a:t>
-            </a:r>
-            <a:endParaRPr lang="en-US" sz="1100" dirty="0"/>
-          </a:p>
-        </p:txBody>
-      </p:sp>
-      <p:sp>
-        <p:nvSpPr>
-          <p:cNvPr id="12" name="Shape 9"/>
-          <p:cNvSpPr/>
-          <p:nvPr/>
-        </p:nvSpPr>
-        <p:spPr>
-          <a:xfrm>
-            <a:off x="7680960" y="3063240"/>
-            <a:ext cx="3977640" cy="457200"/>
+            <a:off x="502920" y="1572768"/>
+            <a:ext cx="1828800" cy="1024128"/>
           </a:xfrm>
           <a:prstGeom prst="rect">
             <a:avLst/>
@@ -9416,14 +9791,34 @@
       </p:sp>
       <p:sp>
         <p:nvSpPr>
-          <p:cNvPr id="13" name="Text 10"/>
-          <p:cNvSpPr/>
-          <p:nvPr/>
-        </p:nvSpPr>
-        <p:spPr>
-          <a:xfrm>
-            <a:off x="7818120" y="3063240"/>
-            <a:ext cx="548640" cy="457200"/>
+          <p:cNvPr id="8" name="Shape 6"/>
+          <p:cNvSpPr/>
+          <p:nvPr/>
+        </p:nvSpPr>
+        <p:spPr>
+          <a:xfrm>
+            <a:off x="502920" y="1572768"/>
+            <a:ext cx="1828800" cy="73152"/>
+          </a:xfrm>
+          <a:prstGeom prst="rect">
+            <a:avLst/>
+          </a:prstGeom>
+          <a:solidFill>
+            <a:srgbClr val="6BA0D8"/>
+          </a:solidFill>
+          <a:ln/>
+        </p:spPr>
+      </p:sp>
+      <p:sp>
+        <p:nvSpPr>
+          <p:cNvPr id="9" name="Text 7"/>
+          <p:cNvSpPr/>
+          <p:nvPr/>
+        </p:nvSpPr>
+        <p:spPr>
+          <a:xfrm>
+            <a:off x="576072" y="1755648"/>
+            <a:ext cx="1682496" cy="457200"/>
           </a:xfrm>
           <a:prstGeom prst="rect">
             <a:avLst/>
@@ -9435,34 +9830,181 @@
           <a:bodyPr wrap="square" lIns="0" tIns="0" rIns="0" bIns="0" rtlCol="0" anchor="ctr"/>
           <a:lstStyle/>
           <a:p>
-            <a:pPr algn="l" indent="0" marL="0">
-              <a:buNone/>
-            </a:pPr>
-            <a:r>
-              <a:rPr lang="en-US" sz="1400" b="1" dirty="0">
-                <a:solidFill>
-                  <a:srgbClr val="ECC069"/>
-                </a:solidFill>
-                <a:latin typeface="Helvetica Neue" pitchFamily="34" charset="0"/>
-                <a:ea typeface="Helvetica Neue" pitchFamily="34" charset="-122"/>
-                <a:cs typeface="Helvetica Neue" pitchFamily="34" charset="-120"/>
-              </a:rPr>
-              <a:t>01</a:t>
-            </a:r>
-            <a:endParaRPr lang="en-US" sz="1400" dirty="0"/>
-          </a:p>
-        </p:txBody>
-      </p:sp>
-      <p:sp>
-        <p:nvSpPr>
-          <p:cNvPr id="14" name="Text 11"/>
-          <p:cNvSpPr/>
-          <p:nvPr/>
-        </p:nvSpPr>
-        <p:spPr>
-          <a:xfrm>
-            <a:off x="8412480" y="3063240"/>
-            <a:ext cx="3154680" cy="457200"/>
+            <a:pPr algn="ctr" indent="0" marL="0">
+              <a:buNone/>
+            </a:pPr>
+            <a:r>
+              <a:rPr lang="en-US" sz="1150" b="1" dirty="0">
+                <a:solidFill>
+                  <a:srgbClr val="6BA0D8"/>
+                </a:solidFill>
+                <a:latin typeface="Helvetica Neue" pitchFamily="34" charset="0"/>
+                <a:ea typeface="Helvetica Neue" pitchFamily="34" charset="-122"/>
+                <a:cs typeface="Helvetica Neue" pitchFamily="34" charset="-120"/>
+              </a:rPr>
+              <a:t>① AI SENSE-MAKING</a:t>
+            </a:r>
+            <a:endParaRPr lang="en-US" sz="1150" dirty="0"/>
+          </a:p>
+        </p:txBody>
+      </p:sp>
+      <p:sp>
+        <p:nvSpPr>
+          <p:cNvPr id="10" name="Text 8"/>
+          <p:cNvSpPr/>
+          <p:nvPr/>
+        </p:nvSpPr>
+        <p:spPr>
+          <a:xfrm>
+            <a:off x="576072" y="2176272"/>
+            <a:ext cx="1682496" cy="237744"/>
+          </a:xfrm>
+          <a:prstGeom prst="rect">
+            <a:avLst/>
+          </a:prstGeom>
+          <a:noFill/>
+          <a:ln/>
+        </p:spPr>
+        <p:txBody>
+          <a:bodyPr wrap="square" lIns="0" tIns="0" rIns="0" bIns="0" rtlCol="0" anchor="t"/>
+          <a:lstStyle/>
+          <a:p>
+            <a:pPr algn="ctr" indent="0" marL="0">
+              <a:buNone/>
+            </a:pPr>
+            <a:r>
+              <a:rPr lang="en-US" sz="850" dirty="0">
+                <a:solidFill>
+                  <a:srgbClr val="8A93A0"/>
+                </a:solidFill>
+                <a:latin typeface="Helvetica Neue" pitchFamily="34" charset="0"/>
+                <a:ea typeface="Helvetica Neue" pitchFamily="34" charset="-122"/>
+                <a:cs typeface="Helvetica Neue" pitchFamily="34" charset="-120"/>
+              </a:rPr>
+              <a:t>reads free text</a:t>
+            </a:r>
+            <a:endParaRPr lang="en-US" sz="850" dirty="0"/>
+          </a:p>
+        </p:txBody>
+      </p:sp>
+      <p:sp>
+        <p:nvSpPr>
+          <p:cNvPr id="11" name="Text 9"/>
+          <p:cNvSpPr/>
+          <p:nvPr/>
+        </p:nvSpPr>
+        <p:spPr>
+          <a:xfrm>
+            <a:off x="576072" y="2395728"/>
+            <a:ext cx="1682496" cy="182880"/>
+          </a:xfrm>
+          <a:prstGeom prst="rect">
+            <a:avLst/>
+          </a:prstGeom>
+          <a:noFill/>
+          <a:ln/>
+        </p:spPr>
+        <p:txBody>
+          <a:bodyPr wrap="square" lIns="0" tIns="0" rIns="0" bIns="0" rtlCol="0" anchor="t"/>
+          <a:lstStyle/>
+          <a:p>
+            <a:pPr algn="ctr" indent="0" marL="0">
+              <a:buNone/>
+            </a:pPr>
+            <a:r>
+              <a:rPr lang="en-US" sz="800" i="1" spc="100" kern="0" dirty="0">
+                <a:solidFill>
+                  <a:srgbClr val="6BA0D8"/>
+                </a:solidFill>
+                <a:latin typeface="Helvetica Neue" pitchFamily="34" charset="0"/>
+                <a:ea typeface="Helvetica Neue" pitchFamily="34" charset="-122"/>
+                <a:cs typeface="Helvetica Neue" pitchFamily="34" charset="-120"/>
+              </a:rPr>
+              <a:t>advisory</a:t>
+            </a:r>
+            <a:endParaRPr lang="en-US" sz="800" dirty="0"/>
+          </a:p>
+        </p:txBody>
+      </p:sp>
+      <p:sp>
+        <p:nvSpPr>
+          <p:cNvPr id="12" name="Shape 10"/>
+          <p:cNvSpPr/>
+          <p:nvPr/>
+        </p:nvSpPr>
+        <p:spPr>
+          <a:xfrm>
+            <a:off x="2331720" y="2084832"/>
+            <a:ext cx="502920" cy="0"/>
+          </a:xfrm>
+          <a:prstGeom prst="line">
+            <a:avLst/>
+          </a:prstGeom>
+          <a:noFill/>
+          <a:ln w="19050">
+            <a:solidFill>
+              <a:srgbClr val="D9A441"/>
+            </a:solidFill>
+            <a:prstDash val="solid"/>
+            <a:tailEnd type="triangle"/>
+          </a:ln>
+        </p:spPr>
+      </p:sp>
+      <p:sp>
+        <p:nvSpPr>
+          <p:cNvPr id="13" name="Shape 11"/>
+          <p:cNvSpPr/>
+          <p:nvPr/>
+        </p:nvSpPr>
+        <p:spPr>
+          <a:xfrm>
+            <a:off x="2834640" y="1572768"/>
+            <a:ext cx="1828800" cy="1024128"/>
+          </a:xfrm>
+          <a:prstGeom prst="rect">
+            <a:avLst/>
+          </a:prstGeom>
+          <a:solidFill>
+            <a:srgbClr val="232B37"/>
+          </a:solidFill>
+          <a:ln w="25400">
+            <a:solidFill>
+              <a:srgbClr val="4FBF87"/>
+            </a:solidFill>
+            <a:prstDash val="solid"/>
+          </a:ln>
+        </p:spPr>
+      </p:sp>
+      <p:sp>
+        <p:nvSpPr>
+          <p:cNvPr id="14" name="Shape 12"/>
+          <p:cNvSpPr/>
+          <p:nvPr/>
+        </p:nvSpPr>
+        <p:spPr>
+          <a:xfrm>
+            <a:off x="2834640" y="1572768"/>
+            <a:ext cx="1828800" cy="73152"/>
+          </a:xfrm>
+          <a:prstGeom prst="rect">
+            <a:avLst/>
+          </a:prstGeom>
+          <a:solidFill>
+            <a:srgbClr val="4FBF87"/>
+          </a:solidFill>
+          <a:ln/>
+        </p:spPr>
+      </p:sp>
+      <p:sp>
+        <p:nvSpPr>
+          <p:cNvPr id="15" name="Text 13"/>
+          <p:cNvSpPr/>
+          <p:nvPr/>
+        </p:nvSpPr>
+        <p:spPr>
+          <a:xfrm>
+            <a:off x="2907792" y="1755648"/>
+            <a:ext cx="1682496" cy="457200"/>
           </a:xfrm>
           <a:prstGeom prst="rect">
             <a:avLst/>
@@ -9474,34 +10016,322 @@
           <a:bodyPr wrap="square" lIns="0" tIns="0" rIns="0" bIns="0" rtlCol="0" anchor="ctr"/>
           <a:lstStyle/>
           <a:p>
-            <a:pPr algn="l" indent="0" marL="0">
-              <a:buNone/>
-            </a:pPr>
-            <a:r>
-              <a:rPr lang="en-US" sz="1300" dirty="0">
-                <a:solidFill>
-                  <a:srgbClr val="D9DEE6"/>
-                </a:solidFill>
-                <a:latin typeface="Helvetica Neue" pitchFamily="34" charset="0"/>
-                <a:ea typeface="Helvetica Neue" pitchFamily="34" charset="-122"/>
-                <a:cs typeface="Helvetica Neue" pitchFamily="34" charset="-120"/>
-              </a:rPr>
-              <a:t>Refiner trading desk</a:t>
-            </a:r>
-            <a:endParaRPr lang="en-US" sz="1300" dirty="0"/>
-          </a:p>
-        </p:txBody>
-      </p:sp>
-      <p:sp>
-        <p:nvSpPr>
-          <p:cNvPr id="15" name="Shape 12"/>
-          <p:cNvSpPr/>
-          <p:nvPr/>
-        </p:nvSpPr>
-        <p:spPr>
-          <a:xfrm>
-            <a:off x="7680960" y="3630168"/>
-            <a:ext cx="3977640" cy="457200"/>
+            <a:pPr algn="ctr" indent="0" marL="0">
+              <a:buNone/>
+            </a:pPr>
+            <a:r>
+              <a:rPr lang="en-US" sz="1150" b="1" dirty="0">
+                <a:solidFill>
+                  <a:srgbClr val="4FBF87"/>
+                </a:solidFill>
+                <a:latin typeface="Helvetica Neue" pitchFamily="34" charset="0"/>
+                <a:ea typeface="Helvetica Neue" pitchFamily="34" charset="-122"/>
+                <a:cs typeface="Helvetica Neue" pitchFamily="34" charset="-120"/>
+              </a:rPr>
+              <a:t>② VALIDATION GATE</a:t>
+            </a:r>
+            <a:endParaRPr lang="en-US" sz="1150" dirty="0"/>
+          </a:p>
+        </p:txBody>
+      </p:sp>
+      <p:sp>
+        <p:nvSpPr>
+          <p:cNvPr id="16" name="Text 14"/>
+          <p:cNvSpPr/>
+          <p:nvPr/>
+        </p:nvSpPr>
+        <p:spPr>
+          <a:xfrm>
+            <a:off x="2907792" y="2176272"/>
+            <a:ext cx="1682496" cy="237744"/>
+          </a:xfrm>
+          <a:prstGeom prst="rect">
+            <a:avLst/>
+          </a:prstGeom>
+          <a:noFill/>
+          <a:ln/>
+        </p:spPr>
+        <p:txBody>
+          <a:bodyPr wrap="square" lIns="0" tIns="0" rIns="0" bIns="0" rtlCol="0" anchor="t"/>
+          <a:lstStyle/>
+          <a:p>
+            <a:pPr algn="ctr" indent="0" marL="0">
+              <a:buNone/>
+            </a:pPr>
+            <a:r>
+              <a:rPr lang="en-US" sz="850" dirty="0">
+                <a:solidFill>
+                  <a:srgbClr val="8A93A0"/>
+                </a:solidFill>
+                <a:latin typeface="Helvetica Neue" pitchFamily="34" charset="0"/>
+                <a:ea typeface="Helvetica Neue" pitchFamily="34" charset="-122"/>
+                <a:cs typeface="Helvetica Neue" pitchFamily="34" charset="-120"/>
+              </a:rPr>
+              <a:t>strict schema + rules</a:t>
+            </a:r>
+            <a:endParaRPr lang="en-US" sz="850" dirty="0"/>
+          </a:p>
+        </p:txBody>
+      </p:sp>
+      <p:sp>
+        <p:nvSpPr>
+          <p:cNvPr id="17" name="Text 15"/>
+          <p:cNvSpPr/>
+          <p:nvPr/>
+        </p:nvSpPr>
+        <p:spPr>
+          <a:xfrm>
+            <a:off x="2907792" y="2395728"/>
+            <a:ext cx="1682496" cy="182880"/>
+          </a:xfrm>
+          <a:prstGeom prst="rect">
+            <a:avLst/>
+          </a:prstGeom>
+          <a:noFill/>
+          <a:ln/>
+        </p:spPr>
+        <p:txBody>
+          <a:bodyPr wrap="square" lIns="0" tIns="0" rIns="0" bIns="0" rtlCol="0" anchor="t"/>
+          <a:lstStyle/>
+          <a:p>
+            <a:pPr algn="ctr" indent="0" marL="0">
+              <a:buNone/>
+            </a:pPr>
+            <a:r>
+              <a:rPr lang="en-US" sz="800" i="1" spc="100" kern="0" dirty="0">
+                <a:solidFill>
+                  <a:srgbClr val="4FBF87"/>
+                </a:solidFill>
+                <a:latin typeface="Helvetica Neue" pitchFamily="34" charset="0"/>
+                <a:ea typeface="Helvetica Neue" pitchFamily="34" charset="-122"/>
+                <a:cs typeface="Helvetica Neue" pitchFamily="34" charset="-120"/>
+              </a:rPr>
+              <a:t>authoritative</a:t>
+            </a:r>
+            <a:endParaRPr lang="en-US" sz="800" dirty="0"/>
+          </a:p>
+        </p:txBody>
+      </p:sp>
+      <p:sp>
+        <p:nvSpPr>
+          <p:cNvPr id="18" name="Shape 16"/>
+          <p:cNvSpPr/>
+          <p:nvPr/>
+        </p:nvSpPr>
+        <p:spPr>
+          <a:xfrm>
+            <a:off x="4663440" y="2084832"/>
+            <a:ext cx="502920" cy="0"/>
+          </a:xfrm>
+          <a:prstGeom prst="line">
+            <a:avLst/>
+          </a:prstGeom>
+          <a:noFill/>
+          <a:ln w="19050">
+            <a:solidFill>
+              <a:srgbClr val="D9A441"/>
+            </a:solidFill>
+            <a:prstDash val="solid"/>
+            <a:tailEnd type="triangle"/>
+          </a:ln>
+        </p:spPr>
+      </p:sp>
+      <p:sp>
+        <p:nvSpPr>
+          <p:cNvPr id="19" name="Shape 17"/>
+          <p:cNvSpPr/>
+          <p:nvPr/>
+        </p:nvSpPr>
+        <p:spPr>
+          <a:xfrm>
+            <a:off x="5166360" y="1572768"/>
+            <a:ext cx="1828800" cy="1024128"/>
+          </a:xfrm>
+          <a:prstGeom prst="rect">
+            <a:avLst/>
+          </a:prstGeom>
+          <a:solidFill>
+            <a:srgbClr val="232B37"/>
+          </a:solidFill>
+          <a:ln w="25400">
+            <a:solidFill>
+              <a:srgbClr val="4FBF87"/>
+            </a:solidFill>
+            <a:prstDash val="solid"/>
+          </a:ln>
+        </p:spPr>
+      </p:sp>
+      <p:sp>
+        <p:nvSpPr>
+          <p:cNvPr id="20" name="Shape 18"/>
+          <p:cNvSpPr/>
+          <p:nvPr/>
+        </p:nvSpPr>
+        <p:spPr>
+          <a:xfrm>
+            <a:off x="5166360" y="1572768"/>
+            <a:ext cx="1828800" cy="73152"/>
+          </a:xfrm>
+          <a:prstGeom prst="rect">
+            <a:avLst/>
+          </a:prstGeom>
+          <a:solidFill>
+            <a:srgbClr val="4FBF87"/>
+          </a:solidFill>
+          <a:ln/>
+        </p:spPr>
+      </p:sp>
+      <p:sp>
+        <p:nvSpPr>
+          <p:cNvPr id="21" name="Text 19"/>
+          <p:cNvSpPr/>
+          <p:nvPr/>
+        </p:nvSpPr>
+        <p:spPr>
+          <a:xfrm>
+            <a:off x="5239512" y="1755648"/>
+            <a:ext cx="1682496" cy="457200"/>
+          </a:xfrm>
+          <a:prstGeom prst="rect">
+            <a:avLst/>
+          </a:prstGeom>
+          <a:noFill/>
+          <a:ln/>
+        </p:spPr>
+        <p:txBody>
+          <a:bodyPr wrap="square" lIns="0" tIns="0" rIns="0" bIns="0" rtlCol="0" anchor="ctr"/>
+          <a:lstStyle/>
+          <a:p>
+            <a:pPr algn="ctr" indent="0" marL="0">
+              <a:buNone/>
+            </a:pPr>
+            <a:r>
+              <a:rPr lang="en-US" sz="1150" b="1" dirty="0">
+                <a:solidFill>
+                  <a:srgbClr val="4FBF87"/>
+                </a:solidFill>
+                <a:latin typeface="Helvetica Neue" pitchFamily="34" charset="0"/>
+                <a:ea typeface="Helvetica Neue" pitchFamily="34" charset="-122"/>
+                <a:cs typeface="Helvetica Neue" pitchFamily="34" charset="-120"/>
+              </a:rPr>
+              <a:t>③ DETERMINISTIC SCORING</a:t>
+            </a:r>
+            <a:endParaRPr lang="en-US" sz="1150" dirty="0"/>
+          </a:p>
+        </p:txBody>
+      </p:sp>
+      <p:sp>
+        <p:nvSpPr>
+          <p:cNvPr id="22" name="Text 20"/>
+          <p:cNvSpPr/>
+          <p:nvPr/>
+        </p:nvSpPr>
+        <p:spPr>
+          <a:xfrm>
+            <a:off x="5239512" y="2176272"/>
+            <a:ext cx="1682496" cy="237744"/>
+          </a:xfrm>
+          <a:prstGeom prst="rect">
+            <a:avLst/>
+          </a:prstGeom>
+          <a:noFill/>
+          <a:ln/>
+        </p:spPr>
+        <p:txBody>
+          <a:bodyPr wrap="square" lIns="0" tIns="0" rIns="0" bIns="0" rtlCol="0" anchor="t"/>
+          <a:lstStyle/>
+          <a:p>
+            <a:pPr algn="ctr" indent="0" marL="0">
+              <a:buNone/>
+            </a:pPr>
+            <a:r>
+              <a:rPr lang="en-US" sz="850" dirty="0">
+                <a:solidFill>
+                  <a:srgbClr val="8A93A0"/>
+                </a:solidFill>
+                <a:latin typeface="Helvetica Neue" pitchFamily="34" charset="0"/>
+                <a:ea typeface="Helvetica Neue" pitchFamily="34" charset="-122"/>
+                <a:cs typeface="Helvetica Neue" pitchFamily="34" charset="-120"/>
+              </a:rPr>
+              <a:t>rescore · critic · arbiter</a:t>
+            </a:r>
+            <a:endParaRPr lang="en-US" sz="850" dirty="0"/>
+          </a:p>
+        </p:txBody>
+      </p:sp>
+      <p:sp>
+        <p:nvSpPr>
+          <p:cNvPr id="23" name="Text 21"/>
+          <p:cNvSpPr/>
+          <p:nvPr/>
+        </p:nvSpPr>
+        <p:spPr>
+          <a:xfrm>
+            <a:off x="5239512" y="2395728"/>
+            <a:ext cx="1682496" cy="182880"/>
+          </a:xfrm>
+          <a:prstGeom prst="rect">
+            <a:avLst/>
+          </a:prstGeom>
+          <a:noFill/>
+          <a:ln/>
+        </p:spPr>
+        <p:txBody>
+          <a:bodyPr wrap="square" lIns="0" tIns="0" rIns="0" bIns="0" rtlCol="0" anchor="t"/>
+          <a:lstStyle/>
+          <a:p>
+            <a:pPr algn="ctr" indent="0" marL="0">
+              <a:buNone/>
+            </a:pPr>
+            <a:r>
+              <a:rPr lang="en-US" sz="800" i="1" spc="100" kern="0" dirty="0">
+                <a:solidFill>
+                  <a:srgbClr val="4FBF87"/>
+                </a:solidFill>
+                <a:latin typeface="Helvetica Neue" pitchFamily="34" charset="0"/>
+                <a:ea typeface="Helvetica Neue" pitchFamily="34" charset="-122"/>
+                <a:cs typeface="Helvetica Neue" pitchFamily="34" charset="-120"/>
+              </a:rPr>
+              <a:t>authoritative</a:t>
+            </a:r>
+            <a:endParaRPr lang="en-US" sz="800" dirty="0"/>
+          </a:p>
+        </p:txBody>
+      </p:sp>
+      <p:sp>
+        <p:nvSpPr>
+          <p:cNvPr id="24" name="Shape 22"/>
+          <p:cNvSpPr/>
+          <p:nvPr/>
+        </p:nvSpPr>
+        <p:spPr>
+          <a:xfrm>
+            <a:off x="6995160" y="2084832"/>
+            <a:ext cx="502920" cy="0"/>
+          </a:xfrm>
+          <a:prstGeom prst="line">
+            <a:avLst/>
+          </a:prstGeom>
+          <a:noFill/>
+          <a:ln w="19050">
+            <a:solidFill>
+              <a:srgbClr val="D9A441"/>
+            </a:solidFill>
+            <a:prstDash val="solid"/>
+            <a:tailEnd type="triangle"/>
+          </a:ln>
+        </p:spPr>
+      </p:sp>
+      <p:sp>
+        <p:nvSpPr>
+          <p:cNvPr id="25" name="Shape 23"/>
+          <p:cNvSpPr/>
+          <p:nvPr/>
+        </p:nvSpPr>
+        <p:spPr>
+          <a:xfrm>
+            <a:off x="7498080" y="1572768"/>
+            <a:ext cx="1828800" cy="1024128"/>
           </a:xfrm>
           <a:prstGeom prst="rect">
             <a:avLst/>
@@ -9519,14 +10349,34 @@
       </p:sp>
       <p:sp>
         <p:nvSpPr>
-          <p:cNvPr id="16" name="Text 13"/>
-          <p:cNvSpPr/>
-          <p:nvPr/>
-        </p:nvSpPr>
-        <p:spPr>
-          <a:xfrm>
-            <a:off x="7818120" y="3630168"/>
-            <a:ext cx="548640" cy="457200"/>
+          <p:cNvPr id="26" name="Shape 24"/>
+          <p:cNvSpPr/>
+          <p:nvPr/>
+        </p:nvSpPr>
+        <p:spPr>
+          <a:xfrm>
+            <a:off x="7498080" y="1572768"/>
+            <a:ext cx="1828800" cy="73152"/>
+          </a:xfrm>
+          <a:prstGeom prst="rect">
+            <a:avLst/>
+          </a:prstGeom>
+          <a:solidFill>
+            <a:srgbClr val="6BA0D8"/>
+          </a:solidFill>
+          <a:ln/>
+        </p:spPr>
+      </p:sp>
+      <p:sp>
+        <p:nvSpPr>
+          <p:cNvPr id="27" name="Text 25"/>
+          <p:cNvSpPr/>
+          <p:nvPr/>
+        </p:nvSpPr>
+        <p:spPr>
+          <a:xfrm>
+            <a:off x="7571232" y="1755648"/>
+            <a:ext cx="1682496" cy="457200"/>
           </a:xfrm>
           <a:prstGeom prst="rect">
             <a:avLst/>
@@ -9538,73 +10388,136 @@
           <a:bodyPr wrap="square" lIns="0" tIns="0" rIns="0" bIns="0" rtlCol="0" anchor="ctr"/>
           <a:lstStyle/>
           <a:p>
-            <a:pPr algn="l" indent="0" marL="0">
-              <a:buNone/>
-            </a:pPr>
-            <a:r>
-              <a:rPr lang="en-US" sz="1400" b="1" dirty="0">
-                <a:solidFill>
-                  <a:srgbClr val="ECC069"/>
-                </a:solidFill>
-                <a:latin typeface="Helvetica Neue" pitchFamily="34" charset="0"/>
-                <a:ea typeface="Helvetica Neue" pitchFamily="34" charset="-122"/>
-                <a:cs typeface="Helvetica Neue" pitchFamily="34" charset="-120"/>
-              </a:rPr>
-              <a:t>02</a:t>
-            </a:r>
-            <a:endParaRPr lang="en-US" sz="1400" dirty="0"/>
-          </a:p>
-        </p:txBody>
-      </p:sp>
-      <p:sp>
-        <p:nvSpPr>
-          <p:cNvPr id="17" name="Text 14"/>
-          <p:cNvSpPr/>
-          <p:nvPr/>
-        </p:nvSpPr>
-        <p:spPr>
-          <a:xfrm>
-            <a:off x="8412480" y="3630168"/>
-            <a:ext cx="3154680" cy="457200"/>
-          </a:xfrm>
-          <a:prstGeom prst="rect">
-            <a:avLst/>
-          </a:prstGeom>
-          <a:noFill/>
-          <a:ln/>
-        </p:spPr>
-        <p:txBody>
-          <a:bodyPr wrap="square" lIns="0" tIns="0" rIns="0" bIns="0" rtlCol="0" anchor="ctr"/>
-          <a:lstStyle/>
-          <a:p>
-            <a:pPr algn="l" indent="0" marL="0">
-              <a:buNone/>
-            </a:pPr>
-            <a:r>
-              <a:rPr lang="en-US" sz="1300" dirty="0">
-                <a:solidFill>
-                  <a:srgbClr val="D9DEE6"/>
-                </a:solidFill>
-                <a:latin typeface="Helvetica Neue" pitchFamily="34" charset="0"/>
-                <a:ea typeface="Helvetica Neue" pitchFamily="34" charset="-122"/>
-                <a:cs typeface="Helvetica Neue" pitchFamily="34" charset="-120"/>
-              </a:rPr>
-              <a:t>National oil company</a:t>
-            </a:r>
-            <a:endParaRPr lang="en-US" sz="1300" dirty="0"/>
-          </a:p>
-        </p:txBody>
-      </p:sp>
-      <p:sp>
-        <p:nvSpPr>
-          <p:cNvPr id="18" name="Shape 15"/>
-          <p:cNvSpPr/>
-          <p:nvPr/>
-        </p:nvSpPr>
-        <p:spPr>
-          <a:xfrm>
-            <a:off x="7680960" y="4197096"/>
-            <a:ext cx="3977640" cy="457200"/>
+            <a:pPr algn="ctr" indent="0" marL="0">
+              <a:buNone/>
+            </a:pPr>
+            <a:r>
+              <a:rPr lang="en-US" sz="1150" b="1" dirty="0">
+                <a:solidFill>
+                  <a:srgbClr val="6BA0D8"/>
+                </a:solidFill>
+                <a:latin typeface="Helvetica Neue" pitchFamily="34" charset="0"/>
+                <a:ea typeface="Helvetica Neue" pitchFamily="34" charset="-122"/>
+                <a:cs typeface="Helvetica Neue" pitchFamily="34" charset="-120"/>
+              </a:rPr>
+              <a:t>④ AI RULE AUDIT</a:t>
+            </a:r>
+            <a:endParaRPr lang="en-US" sz="1150" dirty="0"/>
+          </a:p>
+        </p:txBody>
+      </p:sp>
+      <p:sp>
+        <p:nvSpPr>
+          <p:cNvPr id="28" name="Text 26"/>
+          <p:cNvSpPr/>
+          <p:nvPr/>
+        </p:nvSpPr>
+        <p:spPr>
+          <a:xfrm>
+            <a:off x="7571232" y="2176272"/>
+            <a:ext cx="1682496" cy="237744"/>
+          </a:xfrm>
+          <a:prstGeom prst="rect">
+            <a:avLst/>
+          </a:prstGeom>
+          <a:noFill/>
+          <a:ln/>
+        </p:spPr>
+        <p:txBody>
+          <a:bodyPr wrap="square" lIns="0" tIns="0" rIns="0" bIns="0" rtlCol="0" anchor="t"/>
+          <a:lstStyle/>
+          <a:p>
+            <a:pPr algn="ctr" indent="0" marL="0">
+              <a:buNone/>
+            </a:pPr>
+            <a:r>
+              <a:rPr lang="en-US" sz="850" dirty="0">
+                <a:solidFill>
+                  <a:srgbClr val="8A93A0"/>
+                </a:solidFill>
+                <a:latin typeface="Helvetica Neue" pitchFamily="34" charset="0"/>
+                <a:ea typeface="Helvetica Neue" pitchFamily="34" charset="-122"/>
+                <a:cs typeface="Helvetica Neue" pitchFamily="34" charset="-120"/>
+              </a:rPr>
+              <a:t>rule gaps · read-only</a:t>
+            </a:r>
+            <a:endParaRPr lang="en-US" sz="850" dirty="0"/>
+          </a:p>
+        </p:txBody>
+      </p:sp>
+      <p:sp>
+        <p:nvSpPr>
+          <p:cNvPr id="29" name="Text 27"/>
+          <p:cNvSpPr/>
+          <p:nvPr/>
+        </p:nvSpPr>
+        <p:spPr>
+          <a:xfrm>
+            <a:off x="7571232" y="2395728"/>
+            <a:ext cx="1682496" cy="182880"/>
+          </a:xfrm>
+          <a:prstGeom prst="rect">
+            <a:avLst/>
+          </a:prstGeom>
+          <a:noFill/>
+          <a:ln/>
+        </p:spPr>
+        <p:txBody>
+          <a:bodyPr wrap="square" lIns="0" tIns="0" rIns="0" bIns="0" rtlCol="0" anchor="t"/>
+          <a:lstStyle/>
+          <a:p>
+            <a:pPr algn="ctr" indent="0" marL="0">
+              <a:buNone/>
+            </a:pPr>
+            <a:r>
+              <a:rPr lang="en-US" sz="800" i="1" spc="100" kern="0" dirty="0">
+                <a:solidFill>
+                  <a:srgbClr val="6BA0D8"/>
+                </a:solidFill>
+                <a:latin typeface="Helvetica Neue" pitchFamily="34" charset="0"/>
+                <a:ea typeface="Helvetica Neue" pitchFamily="34" charset="-122"/>
+                <a:cs typeface="Helvetica Neue" pitchFamily="34" charset="-120"/>
+              </a:rPr>
+              <a:t>advisory</a:t>
+            </a:r>
+            <a:endParaRPr lang="en-US" sz="800" dirty="0"/>
+          </a:p>
+        </p:txBody>
+      </p:sp>
+      <p:sp>
+        <p:nvSpPr>
+          <p:cNvPr id="30" name="Shape 28"/>
+          <p:cNvSpPr/>
+          <p:nvPr/>
+        </p:nvSpPr>
+        <p:spPr>
+          <a:xfrm>
+            <a:off x="9326880" y="2084832"/>
+            <a:ext cx="502920" cy="0"/>
+          </a:xfrm>
+          <a:prstGeom prst="line">
+            <a:avLst/>
+          </a:prstGeom>
+          <a:noFill/>
+          <a:ln w="19050">
+            <a:solidFill>
+              <a:srgbClr val="D9A441"/>
+            </a:solidFill>
+            <a:prstDash val="solid"/>
+            <a:tailEnd type="triangle"/>
+          </a:ln>
+        </p:spPr>
+      </p:sp>
+      <p:sp>
+        <p:nvSpPr>
+          <p:cNvPr id="31" name="Shape 29"/>
+          <p:cNvSpPr/>
+          <p:nvPr/>
+        </p:nvSpPr>
+        <p:spPr>
+          <a:xfrm>
+            <a:off x="9829800" y="1572768"/>
+            <a:ext cx="1828800" cy="1024128"/>
           </a:xfrm>
           <a:prstGeom prst="rect">
             <a:avLst/>
@@ -9622,14 +10535,34 @@
       </p:sp>
       <p:sp>
         <p:nvSpPr>
-          <p:cNvPr id="19" name="Text 16"/>
-          <p:cNvSpPr/>
-          <p:nvPr/>
-        </p:nvSpPr>
-        <p:spPr>
-          <a:xfrm>
-            <a:off x="7818120" y="4197096"/>
-            <a:ext cx="548640" cy="457200"/>
+          <p:cNvPr id="32" name="Shape 30"/>
+          <p:cNvSpPr/>
+          <p:nvPr/>
+        </p:nvSpPr>
+        <p:spPr>
+          <a:xfrm>
+            <a:off x="9829800" y="1572768"/>
+            <a:ext cx="1828800" cy="73152"/>
+          </a:xfrm>
+          <a:prstGeom prst="rect">
+            <a:avLst/>
+          </a:prstGeom>
+          <a:solidFill>
+            <a:srgbClr val="D9A441"/>
+          </a:solidFill>
+          <a:ln/>
+        </p:spPr>
+      </p:sp>
+      <p:sp>
+        <p:nvSpPr>
+          <p:cNvPr id="33" name="Text 31"/>
+          <p:cNvSpPr/>
+          <p:nvPr/>
+        </p:nvSpPr>
+        <p:spPr>
+          <a:xfrm>
+            <a:off x="9902952" y="1755648"/>
+            <a:ext cx="1682496" cy="457200"/>
           </a:xfrm>
           <a:prstGeom prst="rect">
             <a:avLst/>
@@ -9641,11 +10574,324 @@
           <a:bodyPr wrap="square" lIns="0" tIns="0" rIns="0" bIns="0" rtlCol="0" anchor="ctr"/>
           <a:lstStyle/>
           <a:p>
-            <a:pPr algn="l" indent="0" marL="0">
-              <a:buNone/>
-            </a:pPr>
-            <a:r>
-              <a:rPr lang="en-US" sz="1400" b="1" dirty="0">
+            <a:pPr algn="ctr" indent="0" marL="0">
+              <a:buNone/>
+            </a:pPr>
+            <a:r>
+              <a:rPr lang="en-US" sz="1150" b="1" dirty="0">
+                <a:solidFill>
+                  <a:srgbClr val="D9A441"/>
+                </a:solidFill>
+                <a:latin typeface="Helvetica Neue" pitchFamily="34" charset="0"/>
+                <a:ea typeface="Helvetica Neue" pitchFamily="34" charset="-122"/>
+                <a:cs typeface="Helvetica Neue" pitchFamily="34" charset="-120"/>
+              </a:rPr>
+              <a:t>⑤ HUMAN APPROVAL</a:t>
+            </a:r>
+            <a:endParaRPr lang="en-US" sz="1150" dirty="0"/>
+          </a:p>
+        </p:txBody>
+      </p:sp>
+      <p:sp>
+        <p:nvSpPr>
+          <p:cNvPr id="34" name="Text 32"/>
+          <p:cNvSpPr/>
+          <p:nvPr/>
+        </p:nvSpPr>
+        <p:spPr>
+          <a:xfrm>
+            <a:off x="9902952" y="2176272"/>
+            <a:ext cx="1682496" cy="237744"/>
+          </a:xfrm>
+          <a:prstGeom prst="rect">
+            <a:avLst/>
+          </a:prstGeom>
+          <a:noFill/>
+          <a:ln/>
+        </p:spPr>
+        <p:txBody>
+          <a:bodyPr wrap="square" lIns="0" tIns="0" rIns="0" bIns="0" rtlCol="0" anchor="t"/>
+          <a:lstStyle/>
+          <a:p>
+            <a:pPr algn="ctr" indent="0" marL="0">
+              <a:buNone/>
+            </a:pPr>
+            <a:r>
+              <a:rPr lang="en-US" sz="850" dirty="0">
+                <a:solidFill>
+                  <a:srgbClr val="8A93A0"/>
+                </a:solidFill>
+                <a:latin typeface="Helvetica Neue" pitchFamily="34" charset="0"/>
+                <a:ea typeface="Helvetica Neue" pitchFamily="34" charset="-122"/>
+                <a:cs typeface="Helvetica Neue" pitchFamily="34" charset="-120"/>
+              </a:rPr>
+              <a:t>logged sign-off</a:t>
+            </a:r>
+            <a:endParaRPr lang="en-US" sz="850" dirty="0"/>
+          </a:p>
+        </p:txBody>
+      </p:sp>
+      <p:sp>
+        <p:nvSpPr>
+          <p:cNvPr id="35" name="Text 33"/>
+          <p:cNvSpPr/>
+          <p:nvPr/>
+        </p:nvSpPr>
+        <p:spPr>
+          <a:xfrm>
+            <a:off x="9902952" y="2395728"/>
+            <a:ext cx="1682496" cy="182880"/>
+          </a:xfrm>
+          <a:prstGeom prst="rect">
+            <a:avLst/>
+          </a:prstGeom>
+          <a:noFill/>
+          <a:ln/>
+        </p:spPr>
+        <p:txBody>
+          <a:bodyPr wrap="square" lIns="0" tIns="0" rIns="0" bIns="0" rtlCol="0" anchor="t"/>
+          <a:lstStyle/>
+          <a:p>
+            <a:pPr algn="ctr" indent="0" marL="0">
+              <a:buNone/>
+            </a:pPr>
+            <a:r>
+              <a:rPr lang="en-US" sz="800" i="1" spc="100" kern="0" dirty="0">
+                <a:solidFill>
+                  <a:srgbClr val="D9A441"/>
+                </a:solidFill>
+                <a:latin typeface="Helvetica Neue" pitchFamily="34" charset="0"/>
+                <a:ea typeface="Helvetica Neue" pitchFamily="34" charset="-122"/>
+                <a:cs typeface="Helvetica Neue" pitchFamily="34" charset="-120"/>
+              </a:rPr>
+              <a:t>human</a:t>
+            </a:r>
+            <a:endParaRPr lang="en-US" sz="800" dirty="0"/>
+          </a:p>
+        </p:txBody>
+      </p:sp>
+      <p:sp>
+        <p:nvSpPr>
+          <p:cNvPr id="36" name="Text 34"/>
+          <p:cNvSpPr/>
+          <p:nvPr/>
+        </p:nvSpPr>
+        <p:spPr>
+          <a:xfrm>
+            <a:off x="502920" y="2724912"/>
+            <a:ext cx="11155680" cy="274320"/>
+          </a:xfrm>
+          <a:prstGeom prst="rect">
+            <a:avLst/>
+          </a:prstGeom>
+          <a:noFill/>
+          <a:ln/>
+        </p:spPr>
+        <p:txBody>
+          <a:bodyPr wrap="square" lIns="0" tIns="0" rIns="0" bIns="0" rtlCol="0" anchor="t"/>
+          <a:lstStyle/>
+          <a:p>
+            <a:pPr algn="ctr" indent="0" marL="0">
+              <a:buNone/>
+            </a:pPr>
+            <a:r>
+              <a:rPr lang="en-US" sz="1100" i="1" dirty="0">
+                <a:solidFill>
+                  <a:srgbClr val="8A93A0"/>
+                </a:solidFill>
+                <a:latin typeface="Helvetica Neue" pitchFamily="34" charset="0"/>
+                <a:ea typeface="Helvetica Neue" pitchFamily="34" charset="-122"/>
+                <a:cs typeface="Helvetica Neue" pitchFamily="34" charset="-120"/>
+              </a:rPr>
+              <a:t>AI (blue) only proposes and observes.  The green rail — validation + scoring — is deterministic and authoritative.  A human signs.</a:t>
+            </a:r>
+            <a:endParaRPr lang="en-US" sz="1100" dirty="0"/>
+          </a:p>
+        </p:txBody>
+      </p:sp>
+      <p:sp>
+        <p:nvSpPr>
+          <p:cNvPr id="37" name="Text 35"/>
+          <p:cNvSpPr/>
+          <p:nvPr/>
+        </p:nvSpPr>
+        <p:spPr>
+          <a:xfrm>
+            <a:off x="502920" y="3246120"/>
+            <a:ext cx="11155680" cy="274320"/>
+          </a:xfrm>
+          <a:prstGeom prst="rect">
+            <a:avLst/>
+          </a:prstGeom>
+          <a:noFill/>
+          <a:ln/>
+        </p:spPr>
+        <p:txBody>
+          <a:bodyPr wrap="square" lIns="0" tIns="0" rIns="0" bIns="0" rtlCol="0" anchor="t"/>
+          <a:lstStyle/>
+          <a:p>
+            <a:pPr algn="l" indent="0" marL="0">
+              <a:buNone/>
+            </a:pPr>
+            <a:r>
+              <a:rPr lang="en-US" sz="1100" b="1" spc="50" kern="0" dirty="0">
+                <a:solidFill>
+                  <a:srgbClr val="D9A441"/>
+                </a:solidFill>
+                <a:latin typeface="Helvetica Neue" pitchFamily="34" charset="0"/>
+                <a:ea typeface="Helvetica Neue" pitchFamily="34" charset="-122"/>
+                <a:cs typeface="Helvetica Neue" pitchFamily="34" charset="-120"/>
+              </a:rPr>
+              <a:t>THE GATE, LIVE — a hallucinated Brent 9000, a 200-day floor, a made-up grade, all rejected before scoring:</a:t>
+            </a:r>
+            <a:endParaRPr lang="en-US" sz="1100" dirty="0"/>
+          </a:p>
+        </p:txBody>
+      </p:sp>
+      <p:sp>
+        <p:nvSpPr>
+          <p:cNvPr id="38" name="Shape 36"/>
+          <p:cNvSpPr/>
+          <p:nvPr/>
+        </p:nvSpPr>
+        <p:spPr>
+          <a:xfrm>
+            <a:off x="502920" y="3566160"/>
+            <a:ext cx="11155680" cy="1373522"/>
+          </a:xfrm>
+          <a:prstGeom prst="rect">
+            <a:avLst/>
+          </a:prstGeom>
+          <a:solidFill>
+            <a:srgbClr val="000000"/>
+          </a:solidFill>
+          <a:ln/>
+          <a:effectLst>
+            <a:outerShdw sx="100000" sy="100000" kx="0" ky="0" algn="bl" rotWithShape="0" blurRad="127000" dist="38100" dir="8100000">
+              <a:srgbClr val="000000">
+                <a:alpha val="45000"/>
+              </a:srgbClr>
+            </a:outerShdw>
+          </a:effectLst>
+        </p:spPr>
+      </p:sp>
+      <p:pic>
+        <p:nvPicPr>
+          <p:cNvPr id="39" name="Image 0" descr="/private/tmp/claude-501/-Users-aman-Downloads-ET-Hackathon/ab60fbe1-6f03-48e5-aa7b-8b187ce1082a/scratchpad/deck-assets/ai_gate.png">    </p:cNvPr>
+          <p:cNvPicPr>
+            <a:picLocks noChangeAspect="1"/>
+          </p:cNvPicPr>
+          <p:nvPr/>
+        </p:nvPicPr>
+        <p:blipFill>
+          <a:blip r:embed="rId1"/>
+          <a:stretch>
+            <a:fillRect/>
+          </a:stretch>
+        </p:blipFill>
+        <p:spPr>
+          <a:xfrm>
+            <a:off x="502920" y="3566160"/>
+            <a:ext cx="11155680" cy="1373522"/>
+          </a:xfrm>
+          <a:prstGeom prst="rect">
+            <a:avLst/>
+          </a:prstGeom>
+        </p:spPr>
+      </p:pic>
+      <p:sp>
+        <p:nvSpPr>
+          <p:cNvPr id="40" name="Shape 37"/>
+          <p:cNvSpPr/>
+          <p:nvPr/>
+        </p:nvSpPr>
+        <p:spPr>
+          <a:xfrm>
+            <a:off x="502920" y="3566160"/>
+            <a:ext cx="11155680" cy="1373522"/>
+          </a:xfrm>
+          <a:prstGeom prst="rect">
+            <a:avLst/>
+          </a:prstGeom>
+          <a:ln w="19050">
+            <a:solidFill>
+              <a:srgbClr val="4FBF87"/>
+            </a:solidFill>
+            <a:prstDash val="solid"/>
+          </a:ln>
+        </p:spPr>
+      </p:sp>
+      <p:sp>
+        <p:nvSpPr>
+          <p:cNvPr id="41" name="Shape 38"/>
+          <p:cNvSpPr/>
+          <p:nvPr/>
+        </p:nvSpPr>
+        <p:spPr>
+          <a:xfrm>
+            <a:off x="502920" y="5122562"/>
+            <a:ext cx="11155680" cy="1170432"/>
+          </a:xfrm>
+          <a:prstGeom prst="rect">
+            <a:avLst/>
+          </a:prstGeom>
+          <a:solidFill>
+            <a:srgbClr val="232B37"/>
+          </a:solidFill>
+          <a:ln w="12700">
+            <a:solidFill>
+              <a:srgbClr val="3A4552"/>
+            </a:solidFill>
+            <a:prstDash val="solid"/>
+          </a:ln>
+        </p:spPr>
+      </p:sp>
+      <p:sp>
+        <p:nvSpPr>
+          <p:cNvPr id="42" name="Shape 39"/>
+          <p:cNvSpPr/>
+          <p:nvPr/>
+        </p:nvSpPr>
+        <p:spPr>
+          <a:xfrm>
+            <a:off x="502920" y="5122562"/>
+            <a:ext cx="64008" cy="1170432"/>
+          </a:xfrm>
+          <a:prstGeom prst="rect">
+            <a:avLst/>
+          </a:prstGeom>
+          <a:solidFill>
+            <a:srgbClr val="D9A441"/>
+          </a:solidFill>
+          <a:ln/>
+        </p:spPr>
+      </p:sp>
+      <p:sp>
+        <p:nvSpPr>
+          <p:cNvPr id="43" name="Text 40"/>
+          <p:cNvSpPr/>
+          <p:nvPr/>
+        </p:nvSpPr>
+        <p:spPr>
+          <a:xfrm>
+            <a:off x="777240" y="5250578"/>
+            <a:ext cx="10698480" cy="365760"/>
+          </a:xfrm>
+          <a:prstGeom prst="rect">
+            <a:avLst/>
+          </a:prstGeom>
+          <a:noFill/>
+          <a:ln/>
+        </p:spPr>
+        <p:txBody>
+          <a:bodyPr wrap="square" lIns="0" tIns="0" rIns="0" bIns="0" rtlCol="0" anchor="t"/>
+          <a:lstStyle/>
+          <a:p>
+            <a:pPr algn="l" indent="0" marL="0">
+              <a:buNone/>
+            </a:pPr>
+            <a:r>
+              <a:rPr lang="en-US" sz="1500" b="1" dirty="0">
                 <a:solidFill>
                   <a:srgbClr val="ECC069"/>
                 </a:solidFill>
@@ -9653,38 +10899,41 @@
                 <a:ea typeface="Helvetica Neue" pitchFamily="34" charset="-122"/>
                 <a:cs typeface="Helvetica Neue" pitchFamily="34" charset="-120"/>
               </a:rPr>
-              <a:t>03</a:t>
-            </a:r>
-            <a:endParaRPr lang="en-US" sz="1400" dirty="0"/>
-          </a:p>
-        </p:txBody>
-      </p:sp>
-      <p:sp>
-        <p:nvSpPr>
-          <p:cNvPr id="20" name="Text 17"/>
-          <p:cNvSpPr/>
-          <p:nvPr/>
-        </p:nvSpPr>
-        <p:spPr>
-          <a:xfrm>
-            <a:off x="8412480" y="4197096"/>
-            <a:ext cx="3154680" cy="457200"/>
-          </a:xfrm>
-          <a:prstGeom prst="rect">
-            <a:avLst/>
-          </a:prstGeom>
-          <a:noFill/>
-          <a:ln/>
-        </p:spPr>
-        <p:txBody>
-          <a:bodyPr wrap="square" lIns="0" tIns="0" rIns="0" bIns="0" rtlCol="0" anchor="ctr"/>
-          <a:lstStyle/>
-          <a:p>
-            <a:pPr algn="l" indent="0" marL="0">
-              <a:buNone/>
-            </a:pPr>
-            <a:r>
-              <a:rPr lang="en-US" sz="1300" dirty="0">
+              <a:t>AI for sense-making and constitutional auditing.  Deterministic logic for scoring.  Humans for final approval.</a:t>
+            </a:r>
+            <a:endParaRPr lang="en-US" sz="1500" dirty="0"/>
+          </a:p>
+        </p:txBody>
+      </p:sp>
+      <p:sp>
+        <p:nvSpPr>
+          <p:cNvPr id="44" name="Text 41"/>
+          <p:cNvSpPr/>
+          <p:nvPr/>
+        </p:nvSpPr>
+        <p:spPr>
+          <a:xfrm>
+            <a:off x="777240" y="5625482"/>
+            <a:ext cx="10698480" cy="621792"/>
+          </a:xfrm>
+          <a:prstGeom prst="rect">
+            <a:avLst/>
+          </a:prstGeom>
+          <a:noFill/>
+          <a:ln/>
+        </p:spPr>
+        <p:txBody>
+          <a:bodyPr wrap="square" lIns="0" tIns="0" rIns="0" bIns="0" rtlCol="0" anchor="t"/>
+          <a:lstStyle/>
+          <a:p>
+            <a:pPr algn="l" indent="0" marL="0">
+              <a:lnSpc>
+                <a:spcPct val="125000"/>
+              </a:lnSpc>
+              <a:buNone/>
+            </a:pPr>
+            <a:r>
+              <a:rPr lang="en-US" sz="1150" dirty="0">
                 <a:solidFill>
                   <a:srgbClr val="D9DEE6"/>
                 </a:solidFill>
@@ -9692,57 +10941,15 @@
                 <a:ea typeface="Helvetica Neue" pitchFamily="34" charset="-122"/>
                 <a:cs typeface="Helvetica Neue" pitchFamily="34" charset="-120"/>
               </a:rPr>
-              <a:t>Ministry crisis cell</a:t>
-            </a:r>
-            <a:endParaRPr lang="en-US" sz="1300" dirty="0"/>
-          </a:p>
-        </p:txBody>
-      </p:sp>
-      <p:sp>
-        <p:nvSpPr>
-          <p:cNvPr id="21" name="Text 18"/>
-          <p:cNvSpPr/>
-          <p:nvPr/>
-        </p:nvSpPr>
-        <p:spPr>
-          <a:xfrm>
-            <a:off x="7680960" y="4892040"/>
-            <a:ext cx="3977640" cy="731520"/>
-          </a:xfrm>
-          <a:prstGeom prst="rect">
-            <a:avLst/>
-          </a:prstGeom>
-          <a:noFill/>
-          <a:ln/>
-        </p:spPr>
-        <p:txBody>
-          <a:bodyPr wrap="square" lIns="0" tIns="0" rIns="0" bIns="0" rtlCol="0" anchor="t"/>
-          <a:lstStyle/>
-          <a:p>
-            <a:pPr algn="l" indent="0" marL="0">
-              <a:lnSpc>
-                <a:spcPct val="120000"/>
-              </a:lnSpc>
-              <a:buNone/>
-            </a:pPr>
-            <a:r>
-              <a:rPr lang="en-US" sz="1050" i="1" dirty="0">
-                <a:solidFill>
-                  <a:srgbClr val="8A93A0"/>
-                </a:solidFill>
-                <a:latin typeface="Helvetica Neue" pitchFamily="34" charset="0"/>
-                <a:ea typeface="Helvetica Neue" pitchFamily="34" charset="-122"/>
-                <a:cs typeface="Helvetica Neue" pitchFamily="34" charset="-120"/>
-              </a:rPr>
-              <a:t>Honest footer: live production feeds (Kpler / Spire) are adapter stubs today — marked “production license.”</a:t>
-            </a:r>
-            <a:endParaRPr lang="en-US" sz="1050" dirty="0"/>
-          </a:p>
-        </p:txBody>
-      </p:sp>
-      <p:sp>
-        <p:nvSpPr>
-          <p:cNvPr id="22" name="Text 19"/>
+              <a:t>Extraction, every gate rejection, scoring, the AI audit, and the human sign-off are each appended to the same SHA-256 hash chain — byte-identical on replay, offline. The LLM is asked for strict JSON and told never to score; anything it fabricates is dropped with a reason and never reaches the engine.</a:t>
+            </a:r>
+            <a:endParaRPr lang="en-US" sz="1150" dirty="0"/>
+          </a:p>
+        </p:txBody>
+      </p:sp>
+      <p:sp>
+        <p:nvSpPr>
+          <p:cNvPr id="45" name="Text 42"/>
           <p:cNvSpPr/>
           <p:nvPr/>
         </p:nvSpPr>
@@ -9773,7 +10980,7 @@
                 <a:ea typeface="Helvetica Neue" pitchFamily="34" charset="-122"/>
                 <a:cs typeface="Helvetica Neue" pitchFamily="34" charset="-120"/>
               </a:rPr>
-              <a:t>Same pure engine, proven deterministic on an arbitrary graph in scripts/check.mjs. They show the disruption; we show the signed, auditable decision.</a:t>
+              <a:t>Given the validated facts, scoring and its audit hashes are byte-identical — the guardrail is what makes an LLM safe for intake. Try it: AI ASSIST ✦ → “⚠ Hallucination test.”</a:t>
             </a:r>
             <a:endParaRPr lang="en-US" sz="850" dirty="0"/>
           </a:p>
@@ -9858,8 +11065,8 @@
         </p:nvSpPr>
         <p:spPr>
           <a:xfrm>
-            <a:off x="0" y="0"/>
-            <a:ext cx="12161520" cy="109728"/>
+            <a:off x="521208" y="484632"/>
+            <a:ext cx="146304" cy="256032"/>
           </a:xfrm>
           <a:prstGeom prst="rect">
             <a:avLst/>
@@ -9878,8 +11085,8 @@
         </p:nvSpPr>
         <p:spPr>
           <a:xfrm>
-            <a:off x="640080" y="1600200"/>
-            <a:ext cx="6949440" cy="777240"/>
+            <a:off x="777240" y="457200"/>
+            <a:ext cx="10881360" cy="310896"/>
           </a:xfrm>
           <a:prstGeom prst="rect">
             <a:avLst/>
@@ -9895,7 +11102,66 @@
               <a:buNone/>
             </a:pPr>
             <a:r>
-              <a:rPr lang="en-US" sz="3600" b="1" dirty="0">
+              <a:rPr lang="en-US" sz="1200" b="1" spc="200" kern="0" dirty="0">
+                <a:solidFill>
+                  <a:srgbClr val="D9A441"/>
+                </a:solidFill>
+                <a:latin typeface="Consolas" pitchFamily="34" charset="0"/>
+                <a:ea typeface="Consolas" pitchFamily="34" charset="-122"/>
+                <a:cs typeface="Consolas" pitchFamily="34" charset="-120"/>
+              </a:rPr>
+              <a:t>SCALE IS CONFIG, NOT CODE</a:t>
+            </a:r>
+            <a:endParaRPr lang="en-US" sz="1200" dirty="0"/>
+          </a:p>
+        </p:txBody>
+      </p:sp>
+      <p:sp>
+        <p:nvSpPr>
+          <p:cNvPr id="5" name="Shape 3"/>
+          <p:cNvSpPr/>
+          <p:nvPr/>
+        </p:nvSpPr>
+        <p:spPr>
+          <a:xfrm>
+            <a:off x="502920" y="841248"/>
+            <a:ext cx="11155680" cy="12802"/>
+          </a:xfrm>
+          <a:prstGeom prst="rect">
+            <a:avLst/>
+          </a:prstGeom>
+          <a:solidFill>
+            <a:srgbClr val="3A4552"/>
+          </a:solidFill>
+          <a:ln/>
+        </p:spPr>
+      </p:sp>
+      <p:sp>
+        <p:nvSpPr>
+          <p:cNvPr id="6" name="Text 4"/>
+          <p:cNvSpPr/>
+          <p:nvPr/>
+        </p:nvSpPr>
+        <p:spPr>
+          <a:xfrm>
+            <a:off x="502920" y="914400"/>
+            <a:ext cx="11155680" cy="457200"/>
+          </a:xfrm>
+          <a:prstGeom prst="rect">
+            <a:avLst/>
+          </a:prstGeom>
+          <a:noFill/>
+          <a:ln/>
+        </p:spPr>
+        <p:txBody>
+          <a:bodyPr wrap="square" lIns="0" tIns="0" rIns="0" bIns="0" rtlCol="0" anchor="t"/>
+          <a:lstStyle/>
+          <a:p>
+            <a:pPr algn="l" indent="0" marL="0">
+              <a:buNone/>
+            </a:pPr>
+            <a:r>
+              <a:rPr lang="en-US" sz="2200" b="1" dirty="0">
                 <a:solidFill>
                   <a:srgbClr val="D9DEE6"/>
                 </a:solidFill>
@@ -9903,90 +11169,9 @@
                 <a:ea typeface="Helvetica Neue" pitchFamily="34" charset="-122"/>
                 <a:cs typeface="Helvetica Neue" pitchFamily="34" charset="-120"/>
               </a:rPr>
-              <a:t>Six days to four minutes.</a:t>
-            </a:r>
-            <a:endParaRPr lang="en-US" sz="3600" dirty="0"/>
-          </a:p>
-        </p:txBody>
-      </p:sp>
-      <p:sp>
-        <p:nvSpPr>
-          <p:cNvPr id="5" name="Text 3"/>
-          <p:cNvSpPr/>
-          <p:nvPr/>
-        </p:nvSpPr>
-        <p:spPr>
-          <a:xfrm>
-            <a:off x="640080" y="2450592"/>
-            <a:ext cx="7040880" cy="640080"/>
-          </a:xfrm>
-          <a:prstGeom prst="rect">
-            <a:avLst/>
-          </a:prstGeom>
-          <a:noFill/>
-          <a:ln/>
-        </p:spPr>
-        <p:txBody>
-          <a:bodyPr wrap="square" lIns="0" tIns="0" rIns="0" bIns="0" rtlCol="0" anchor="ctr"/>
-          <a:lstStyle/>
-          <a:p>
-            <a:pPr algn="l" indent="0" marL="0">
-              <a:buNone/>
-            </a:pPr>
-            <a:r>
-              <a:rPr lang="en-US" sz="2600" b="1" dirty="0">
-                <a:solidFill>
-                  <a:srgbClr val="ECC069"/>
-                </a:solidFill>
-                <a:latin typeface="Helvetica Neue" pitchFamily="34" charset="0"/>
-                <a:ea typeface="Helvetica Neue" pitchFamily="34" charset="-122"/>
-                <a:cs typeface="Helvetica Neue" pitchFamily="34" charset="-120"/>
-              </a:rPr>
-              <a:t>And the argument is on the record.</a:t>
-            </a:r>
-            <a:endParaRPr lang="en-US" sz="2600" dirty="0"/>
-          </a:p>
-        </p:txBody>
-      </p:sp>
-      <p:sp>
-        <p:nvSpPr>
-          <p:cNvPr id="6" name="Text 4"/>
-          <p:cNvSpPr/>
-          <p:nvPr/>
-        </p:nvSpPr>
-        <p:spPr>
-          <a:xfrm>
-            <a:off x="658368" y="3337560"/>
-            <a:ext cx="6858000" cy="914400"/>
-          </a:xfrm>
-          <a:prstGeom prst="rect">
-            <a:avLst/>
-          </a:prstGeom>
-          <a:noFill/>
-          <a:ln/>
-        </p:spPr>
-        <p:txBody>
-          <a:bodyPr wrap="square" lIns="0" tIns="0" rIns="0" bIns="0" rtlCol="0" anchor="t"/>
-          <a:lstStyle/>
-          <a:p>
-            <a:pPr algn="l" indent="0" marL="0">
-              <a:lnSpc>
-                <a:spcPct val="135000"/>
-              </a:lnSpc>
-              <a:buNone/>
-            </a:pPr>
-            <a:r>
-              <a:rPr lang="en-US" sz="1500" dirty="0">
-                <a:solidFill>
-                  <a:srgbClr val="8A93A0"/>
-                </a:solidFill>
-                <a:latin typeface="Helvetica Neue" pitchFamily="34" charset="0"/>
-                <a:ea typeface="Helvetica Neue" pitchFamily="34" charset="-122"/>
-                <a:cs typeface="Helvetica Neue" pitchFamily="34" charset="-120"/>
-              </a:rPr>
-              <a:t>An AI that argues under rules you wrote. A machine — not a model — that enforces them. A decision you can audit.</a:t>
-            </a:r>
-            <a:endParaRPr lang="en-US" sz="1500" dirty="0"/>
+              <a:t>One strait this week. Every chokepoint, every commodity, next.</a:t>
+            </a:r>
+            <a:endParaRPr lang="en-US" sz="2200" dirty="0"/>
           </a:p>
         </p:txBody>
       </p:sp>
@@ -9998,8 +11183,8 @@
         </p:nvSpPr>
         <p:spPr>
           <a:xfrm>
-            <a:off x="7955280" y="1737360"/>
-            <a:ext cx="3657600" cy="2344783"/>
+            <a:off x="502920" y="1554480"/>
+            <a:ext cx="6949440" cy="4343400"/>
           </a:xfrm>
           <a:prstGeom prst="rect">
             <a:avLst/>
@@ -10019,7 +11204,7 @@
       </p:sp>
       <p:pic>
         <p:nvPicPr>
-          <p:cNvPr id="8" name="Image 0" descr="/private/tmp/claude-501/-Users-aman-Downloads-ET-Hackathon/ab60fbe1-6f03-48e5-aa7b-8b187ce1082a/scratchpad/deck-assets/charter_after.png">    </p:cNvPr>
+          <p:cNvPr id="8" name="Image 0" descr="/private/tmp/claude-501/-Users-aman-Downloads-ET-Hackathon/ab60fbe1-6f03-48e5-aa7b-8b187ce1082a/scratchpad/deck-assets/map.png">    </p:cNvPr>
           <p:cNvPicPr>
             <a:picLocks noChangeAspect="1"/>
           </p:cNvPicPr>
@@ -10033,8 +11218,8 @@
         </p:blipFill>
         <p:spPr>
           <a:xfrm>
-            <a:off x="7955280" y="1737360"/>
-            <a:ext cx="3657600" cy="2344783"/>
+            <a:off x="502920" y="1554480"/>
+            <a:ext cx="6949440" cy="4343400"/>
           </a:xfrm>
           <a:prstGeom prst="rect">
             <a:avLst/>
@@ -10049,8 +11234,8 @@
         </p:nvSpPr>
         <p:spPr>
           <a:xfrm>
-            <a:off x="7955280" y="1737360"/>
-            <a:ext cx="3657600" cy="2344783"/>
+            <a:off x="502920" y="1554480"/>
+            <a:ext cx="6949440" cy="4343400"/>
           </a:xfrm>
           <a:prstGeom prst="rect">
             <a:avLst/>
@@ -10071,47 +11256,89 @@
         </p:nvSpPr>
         <p:spPr>
           <a:xfrm>
-            <a:off x="7955280" y="4155295"/>
-            <a:ext cx="3657600" cy="365760"/>
-          </a:xfrm>
-          <a:prstGeom prst="rect">
-            <a:avLst/>
-          </a:prstGeom>
-          <a:noFill/>
-          <a:ln/>
-        </p:spPr>
-        <p:txBody>
-          <a:bodyPr wrap="square" lIns="0" tIns="0" rIns="0" bIns="0" rtlCol="0" anchor="t"/>
-          <a:lstStyle/>
-          <a:p>
-            <a:pPr algn="ctr" indent="0" marL="0">
-              <a:buNone/>
-            </a:pPr>
-            <a:r>
-              <a:rPr lang="en-US" sz="1000" i="1" dirty="0">
-                <a:solidFill>
-                  <a:srgbClr val="8A93A0"/>
-                </a:solidFill>
-                <a:latin typeface="Helvetica Neue" pitchFamily="34" charset="0"/>
-                <a:ea typeface="Helvetica Neue" pitchFamily="34" charset="-122"/>
-                <a:cs typeface="Helvetica Neue" pitchFamily="34" charset="-120"/>
-              </a:rPr>
-              <a:t>the signed audit trace — hash-chained, VERIFIED, one-click printable</a:t>
-            </a:r>
-            <a:endParaRPr lang="en-US" sz="1000" dirty="0"/>
-          </a:p>
-        </p:txBody>
-      </p:sp>
-      <p:sp>
-        <p:nvSpPr>
-          <p:cNvPr id="11" name="Shape 8"/>
-          <p:cNvSpPr/>
-          <p:nvPr/>
-        </p:nvSpPr>
-        <p:spPr>
-          <a:xfrm>
-            <a:off x="640080" y="4572000"/>
-            <a:ext cx="7040880" cy="914400"/>
+            <a:off x="7680960" y="1572768"/>
+            <a:ext cx="3977640" cy="1005840"/>
+          </a:xfrm>
+          <a:prstGeom prst="rect">
+            <a:avLst/>
+          </a:prstGeom>
+          <a:noFill/>
+          <a:ln/>
+        </p:spPr>
+        <p:txBody>
+          <a:bodyPr wrap="square" lIns="0" tIns="0" rIns="0" bIns="0" rtlCol="0" anchor="t"/>
+          <a:lstStyle/>
+          <a:p>
+            <a:pPr algn="l" indent="0" marL="0">
+              <a:lnSpc>
+                <a:spcPct val="130000"/>
+              </a:lnSpc>
+              <a:buNone/>
+            </a:pPr>
+            <a:r>
+              <a:rPr lang="en-US" sz="1400" dirty="0">
+                <a:solidFill>
+                  <a:srgbClr val="D9DEE6"/>
+                </a:solidFill>
+                <a:latin typeface="Helvetica Neue" pitchFamily="34" charset="0"/>
+                <a:ea typeface="Helvetica Neue" pitchFamily="34" charset="-122"/>
+                <a:cs typeface="Helvetica Neue" pitchFamily="34" charset="-120"/>
+              </a:rPr>
+              <a:t>The engine is graph-agnostic. A new theatre — a new chokepoint, a new commodity — is a new data bundle, not new code.</a:t>
+            </a:r>
+            <a:endParaRPr lang="en-US" sz="1400" dirty="0"/>
+          </a:p>
+        </p:txBody>
+      </p:sp>
+      <p:sp>
+        <p:nvSpPr>
+          <p:cNvPr id="11" name="Text 8"/>
+          <p:cNvSpPr/>
+          <p:nvPr/>
+        </p:nvSpPr>
+        <p:spPr>
+          <a:xfrm>
+            <a:off x="7680960" y="2743200"/>
+            <a:ext cx="3977640" cy="274320"/>
+          </a:xfrm>
+          <a:prstGeom prst="rect">
+            <a:avLst/>
+          </a:prstGeom>
+          <a:noFill/>
+          <a:ln/>
+        </p:spPr>
+        <p:txBody>
+          <a:bodyPr wrap="square" lIns="0" tIns="0" rIns="0" bIns="0" rtlCol="0" anchor="t"/>
+          <a:lstStyle/>
+          <a:p>
+            <a:pPr algn="l" indent="0" marL="0">
+              <a:buNone/>
+            </a:pPr>
+            <a:r>
+              <a:rPr lang="en-US" sz="1100" b="1" spc="100" kern="0" dirty="0">
+                <a:solidFill>
+                  <a:srgbClr val="D9A441"/>
+                </a:solidFill>
+                <a:latin typeface="Helvetica Neue" pitchFamily="34" charset="0"/>
+                <a:ea typeface="Helvetica Neue" pitchFamily="34" charset="-122"/>
+                <a:cs typeface="Helvetica Neue" pitchFamily="34" charset="-120"/>
+              </a:rPr>
+              <a:t>THE BUYER LADDER</a:t>
+            </a:r>
+            <a:endParaRPr lang="en-US" sz="1100" dirty="0"/>
+          </a:p>
+        </p:txBody>
+      </p:sp>
+      <p:sp>
+        <p:nvSpPr>
+          <p:cNvPr id="12" name="Shape 9"/>
+          <p:cNvSpPr/>
+          <p:nvPr/>
+        </p:nvSpPr>
+        <p:spPr>
+          <a:xfrm>
+            <a:off x="7680960" y="3063240"/>
+            <a:ext cx="3977640" cy="457200"/>
           </a:xfrm>
           <a:prstGeom prst="rect">
             <a:avLst/>
@@ -10129,14 +11356,14 @@
       </p:sp>
       <p:sp>
         <p:nvSpPr>
-          <p:cNvPr id="12" name="Text 9"/>
-          <p:cNvSpPr/>
-          <p:nvPr/>
-        </p:nvSpPr>
-        <p:spPr>
-          <a:xfrm>
-            <a:off x="868680" y="4572000"/>
-            <a:ext cx="6583680" cy="914400"/>
+          <p:cNvPr id="13" name="Text 10"/>
+          <p:cNvSpPr/>
+          <p:nvPr/>
+        </p:nvSpPr>
+        <p:spPr>
+          <a:xfrm>
+            <a:off x="7818120" y="3063240"/>
+            <a:ext cx="548640" cy="457200"/>
           </a:xfrm>
           <a:prstGeom prst="rect">
             <a:avLst/>
@@ -10152,7 +11379,294 @@
               <a:buNone/>
             </a:pPr>
             <a:r>
-              <a:rPr lang="en-US" sz="1500" b="1" dirty="0">
+              <a:rPr lang="en-US" sz="1400" b="1" dirty="0">
+                <a:solidFill>
+                  <a:srgbClr val="ECC069"/>
+                </a:solidFill>
+                <a:latin typeface="Helvetica Neue" pitchFamily="34" charset="0"/>
+                <a:ea typeface="Helvetica Neue" pitchFamily="34" charset="-122"/>
+                <a:cs typeface="Helvetica Neue" pitchFamily="34" charset="-120"/>
+              </a:rPr>
+              <a:t>01</a:t>
+            </a:r>
+            <a:endParaRPr lang="en-US" sz="1400" dirty="0"/>
+          </a:p>
+        </p:txBody>
+      </p:sp>
+      <p:sp>
+        <p:nvSpPr>
+          <p:cNvPr id="14" name="Text 11"/>
+          <p:cNvSpPr/>
+          <p:nvPr/>
+        </p:nvSpPr>
+        <p:spPr>
+          <a:xfrm>
+            <a:off x="8412480" y="3063240"/>
+            <a:ext cx="3154680" cy="457200"/>
+          </a:xfrm>
+          <a:prstGeom prst="rect">
+            <a:avLst/>
+          </a:prstGeom>
+          <a:noFill/>
+          <a:ln/>
+        </p:spPr>
+        <p:txBody>
+          <a:bodyPr wrap="square" lIns="0" tIns="0" rIns="0" bIns="0" rtlCol="0" anchor="ctr"/>
+          <a:lstStyle/>
+          <a:p>
+            <a:pPr algn="l" indent="0" marL="0">
+              <a:buNone/>
+            </a:pPr>
+            <a:r>
+              <a:rPr lang="en-US" sz="1300" dirty="0">
+                <a:solidFill>
+                  <a:srgbClr val="D9DEE6"/>
+                </a:solidFill>
+                <a:latin typeface="Helvetica Neue" pitchFamily="34" charset="0"/>
+                <a:ea typeface="Helvetica Neue" pitchFamily="34" charset="-122"/>
+                <a:cs typeface="Helvetica Neue" pitchFamily="34" charset="-120"/>
+              </a:rPr>
+              <a:t>Refiner trading desk</a:t>
+            </a:r>
+            <a:endParaRPr lang="en-US" sz="1300" dirty="0"/>
+          </a:p>
+        </p:txBody>
+      </p:sp>
+      <p:sp>
+        <p:nvSpPr>
+          <p:cNvPr id="15" name="Shape 12"/>
+          <p:cNvSpPr/>
+          <p:nvPr/>
+        </p:nvSpPr>
+        <p:spPr>
+          <a:xfrm>
+            <a:off x="7680960" y="3630168"/>
+            <a:ext cx="3977640" cy="457200"/>
+          </a:xfrm>
+          <a:prstGeom prst="rect">
+            <a:avLst/>
+          </a:prstGeom>
+          <a:solidFill>
+            <a:srgbClr val="232B37"/>
+          </a:solidFill>
+          <a:ln w="12700">
+            <a:solidFill>
+              <a:srgbClr val="3A4552"/>
+            </a:solidFill>
+            <a:prstDash val="solid"/>
+          </a:ln>
+        </p:spPr>
+      </p:sp>
+      <p:sp>
+        <p:nvSpPr>
+          <p:cNvPr id="16" name="Text 13"/>
+          <p:cNvSpPr/>
+          <p:nvPr/>
+        </p:nvSpPr>
+        <p:spPr>
+          <a:xfrm>
+            <a:off x="7818120" y="3630168"/>
+            <a:ext cx="548640" cy="457200"/>
+          </a:xfrm>
+          <a:prstGeom prst="rect">
+            <a:avLst/>
+          </a:prstGeom>
+          <a:noFill/>
+          <a:ln/>
+        </p:spPr>
+        <p:txBody>
+          <a:bodyPr wrap="square" lIns="0" tIns="0" rIns="0" bIns="0" rtlCol="0" anchor="ctr"/>
+          <a:lstStyle/>
+          <a:p>
+            <a:pPr algn="l" indent="0" marL="0">
+              <a:buNone/>
+            </a:pPr>
+            <a:r>
+              <a:rPr lang="en-US" sz="1400" b="1" dirty="0">
+                <a:solidFill>
+                  <a:srgbClr val="ECC069"/>
+                </a:solidFill>
+                <a:latin typeface="Helvetica Neue" pitchFamily="34" charset="0"/>
+                <a:ea typeface="Helvetica Neue" pitchFamily="34" charset="-122"/>
+                <a:cs typeface="Helvetica Neue" pitchFamily="34" charset="-120"/>
+              </a:rPr>
+              <a:t>02</a:t>
+            </a:r>
+            <a:endParaRPr lang="en-US" sz="1400" dirty="0"/>
+          </a:p>
+        </p:txBody>
+      </p:sp>
+      <p:sp>
+        <p:nvSpPr>
+          <p:cNvPr id="17" name="Text 14"/>
+          <p:cNvSpPr/>
+          <p:nvPr/>
+        </p:nvSpPr>
+        <p:spPr>
+          <a:xfrm>
+            <a:off x="8412480" y="3630168"/>
+            <a:ext cx="3154680" cy="457200"/>
+          </a:xfrm>
+          <a:prstGeom prst="rect">
+            <a:avLst/>
+          </a:prstGeom>
+          <a:noFill/>
+          <a:ln/>
+        </p:spPr>
+        <p:txBody>
+          <a:bodyPr wrap="square" lIns="0" tIns="0" rIns="0" bIns="0" rtlCol="0" anchor="ctr"/>
+          <a:lstStyle/>
+          <a:p>
+            <a:pPr algn="l" indent="0" marL="0">
+              <a:buNone/>
+            </a:pPr>
+            <a:r>
+              <a:rPr lang="en-US" sz="1300" dirty="0">
+                <a:solidFill>
+                  <a:srgbClr val="D9DEE6"/>
+                </a:solidFill>
+                <a:latin typeface="Helvetica Neue" pitchFamily="34" charset="0"/>
+                <a:ea typeface="Helvetica Neue" pitchFamily="34" charset="-122"/>
+                <a:cs typeface="Helvetica Neue" pitchFamily="34" charset="-120"/>
+              </a:rPr>
+              <a:t>National oil company</a:t>
+            </a:r>
+            <a:endParaRPr lang="en-US" sz="1300" dirty="0"/>
+          </a:p>
+        </p:txBody>
+      </p:sp>
+      <p:sp>
+        <p:nvSpPr>
+          <p:cNvPr id="18" name="Shape 15"/>
+          <p:cNvSpPr/>
+          <p:nvPr/>
+        </p:nvSpPr>
+        <p:spPr>
+          <a:xfrm>
+            <a:off x="7680960" y="4197096"/>
+            <a:ext cx="3977640" cy="457200"/>
+          </a:xfrm>
+          <a:prstGeom prst="rect">
+            <a:avLst/>
+          </a:prstGeom>
+          <a:solidFill>
+            <a:srgbClr val="232B37"/>
+          </a:solidFill>
+          <a:ln w="12700">
+            <a:solidFill>
+              <a:srgbClr val="3A4552"/>
+            </a:solidFill>
+            <a:prstDash val="solid"/>
+          </a:ln>
+        </p:spPr>
+      </p:sp>
+      <p:sp>
+        <p:nvSpPr>
+          <p:cNvPr id="19" name="Text 16"/>
+          <p:cNvSpPr/>
+          <p:nvPr/>
+        </p:nvSpPr>
+        <p:spPr>
+          <a:xfrm>
+            <a:off x="7818120" y="4197096"/>
+            <a:ext cx="548640" cy="457200"/>
+          </a:xfrm>
+          <a:prstGeom prst="rect">
+            <a:avLst/>
+          </a:prstGeom>
+          <a:noFill/>
+          <a:ln/>
+        </p:spPr>
+        <p:txBody>
+          <a:bodyPr wrap="square" lIns="0" tIns="0" rIns="0" bIns="0" rtlCol="0" anchor="ctr"/>
+          <a:lstStyle/>
+          <a:p>
+            <a:pPr algn="l" indent="0" marL="0">
+              <a:buNone/>
+            </a:pPr>
+            <a:r>
+              <a:rPr lang="en-US" sz="1400" b="1" dirty="0">
+                <a:solidFill>
+                  <a:srgbClr val="ECC069"/>
+                </a:solidFill>
+                <a:latin typeface="Helvetica Neue" pitchFamily="34" charset="0"/>
+                <a:ea typeface="Helvetica Neue" pitchFamily="34" charset="-122"/>
+                <a:cs typeface="Helvetica Neue" pitchFamily="34" charset="-120"/>
+              </a:rPr>
+              <a:t>03</a:t>
+            </a:r>
+            <a:endParaRPr lang="en-US" sz="1400" dirty="0"/>
+          </a:p>
+        </p:txBody>
+      </p:sp>
+      <p:sp>
+        <p:nvSpPr>
+          <p:cNvPr id="20" name="Text 17"/>
+          <p:cNvSpPr/>
+          <p:nvPr/>
+        </p:nvSpPr>
+        <p:spPr>
+          <a:xfrm>
+            <a:off x="8412480" y="4197096"/>
+            <a:ext cx="3154680" cy="457200"/>
+          </a:xfrm>
+          <a:prstGeom prst="rect">
+            <a:avLst/>
+          </a:prstGeom>
+          <a:noFill/>
+          <a:ln/>
+        </p:spPr>
+        <p:txBody>
+          <a:bodyPr wrap="square" lIns="0" tIns="0" rIns="0" bIns="0" rtlCol="0" anchor="ctr"/>
+          <a:lstStyle/>
+          <a:p>
+            <a:pPr algn="l" indent="0" marL="0">
+              <a:buNone/>
+            </a:pPr>
+            <a:r>
+              <a:rPr lang="en-US" sz="1300" dirty="0">
+                <a:solidFill>
+                  <a:srgbClr val="D9DEE6"/>
+                </a:solidFill>
+                <a:latin typeface="Helvetica Neue" pitchFamily="34" charset="0"/>
+                <a:ea typeface="Helvetica Neue" pitchFamily="34" charset="-122"/>
+                <a:cs typeface="Helvetica Neue" pitchFamily="34" charset="-120"/>
+              </a:rPr>
+              <a:t>Ministry crisis cell</a:t>
+            </a:r>
+            <a:endParaRPr lang="en-US" sz="1300" dirty="0"/>
+          </a:p>
+        </p:txBody>
+      </p:sp>
+      <p:sp>
+        <p:nvSpPr>
+          <p:cNvPr id="21" name="Text 18"/>
+          <p:cNvSpPr/>
+          <p:nvPr/>
+        </p:nvSpPr>
+        <p:spPr>
+          <a:xfrm>
+            <a:off x="7680960" y="4892040"/>
+            <a:ext cx="3977640" cy="731520"/>
+          </a:xfrm>
+          <a:prstGeom prst="rect">
+            <a:avLst/>
+          </a:prstGeom>
+          <a:noFill/>
+          <a:ln/>
+        </p:spPr>
+        <p:txBody>
+          <a:bodyPr wrap="square" lIns="0" tIns="0" rIns="0" bIns="0" rtlCol="0" anchor="t"/>
+          <a:lstStyle/>
+          <a:p>
+            <a:pPr algn="l" indent="0" marL="0">
+              <a:lnSpc>
+                <a:spcPct val="120000"/>
+              </a:lnSpc>
+              <a:buNone/>
+            </a:pPr>
+            <a:r>
+              <a:rPr lang="en-US" sz="1050" i="1" dirty="0">
                 <a:solidFill>
                   <a:srgbClr val="8A93A0"/>
                 </a:solidFill>
@@ -10160,62 +11674,48 @@
                 <a:ea typeface="Helvetica Neue" pitchFamily="34" charset="-122"/>
                 <a:cs typeface="Helvetica Neue" pitchFamily="34" charset="-120"/>
               </a:rPr>
-              <a:t>DEMO + REPO   </a:t>
-            </a:r>
-            <a:pPr algn="l" indent="0" marL="0">
-              <a:buNone/>
-            </a:pPr>
-            <a:r>
-              <a:rPr lang="en-US" sz="1500" b="1" dirty="0">
-                <a:solidFill>
-                  <a:srgbClr val="6BA0D8"/>
-                </a:solidFill>
-                <a:latin typeface="Helvetica Neue" pitchFamily="34" charset="0"/>
-                <a:ea typeface="Helvetica Neue" pitchFamily="34" charset="-122"/>
-                <a:cs typeface="Helvetica Neue" pitchFamily="34" charset="-120"/>
-              </a:rPr>
-              <a:t>github.com/banthia14aman/ET-Hackathon</a:t>
-            </a:r>
-            <a:endParaRPr lang="en-US" sz="1500" dirty="0"/>
-          </a:p>
-        </p:txBody>
-      </p:sp>
-      <p:sp>
-        <p:nvSpPr>
-          <p:cNvPr id="13" name="Text 10"/>
-          <p:cNvSpPr/>
-          <p:nvPr/>
-        </p:nvSpPr>
-        <p:spPr>
-          <a:xfrm>
-            <a:off x="640080" y="5852160"/>
-            <a:ext cx="6400800" cy="457200"/>
-          </a:xfrm>
-          <a:prstGeom prst="rect">
-            <a:avLst/>
-          </a:prstGeom>
-          <a:noFill/>
-          <a:ln/>
-        </p:spPr>
-        <p:txBody>
-          <a:bodyPr wrap="square" lIns="0" tIns="0" rIns="0" bIns="0" rtlCol="0" anchor="t"/>
-          <a:lstStyle/>
-          <a:p>
-            <a:pPr algn="l" indent="0" marL="0">
-              <a:buNone/>
-            </a:pPr>
-            <a:r>
-              <a:rPr lang="en-US" sz="2000" b="1" spc="300" kern="0" dirty="0">
-                <a:solidFill>
-                  <a:srgbClr val="D9A441"/>
-                </a:solidFill>
-                <a:latin typeface="Helvetica Neue" pitchFamily="34" charset="0"/>
-                <a:ea typeface="Helvetica Neue" pitchFamily="34" charset="-122"/>
-                <a:cs typeface="Helvetica Neue" pitchFamily="34" charset="-120"/>
-              </a:rPr>
-              <a:t>TRIN△ETRA</a:t>
-            </a:r>
-            <a:endParaRPr lang="en-US" sz="2000" dirty="0"/>
+              <a:t>Honest footer: live production feeds (Kpler / Spire) are adapter stubs today — marked “production license.”</a:t>
+            </a:r>
+            <a:endParaRPr lang="en-US" sz="1050" dirty="0"/>
+          </a:p>
+        </p:txBody>
+      </p:sp>
+      <p:sp>
+        <p:nvSpPr>
+          <p:cNvPr id="22" name="Text 19"/>
+          <p:cNvSpPr/>
+          <p:nvPr/>
+        </p:nvSpPr>
+        <p:spPr>
+          <a:xfrm>
+            <a:off x="502920" y="6492240"/>
+            <a:ext cx="9509760" cy="274320"/>
+          </a:xfrm>
+          <a:prstGeom prst="rect">
+            <a:avLst/>
+          </a:prstGeom>
+          <a:noFill/>
+          <a:ln/>
+        </p:spPr>
+        <p:txBody>
+          <a:bodyPr wrap="square" lIns="0" tIns="0" rIns="0" bIns="0" rtlCol="0" anchor="t"/>
+          <a:lstStyle/>
+          <a:p>
+            <a:pPr algn="l" indent="0" marL="0">
+              <a:buNone/>
+            </a:pPr>
+            <a:r>
+              <a:rPr lang="en-US" sz="850" i="1" dirty="0">
+                <a:solidFill>
+                  <a:srgbClr val="8A93A0"/>
+                </a:solidFill>
+                <a:latin typeface="Helvetica Neue" pitchFamily="34" charset="0"/>
+                <a:ea typeface="Helvetica Neue" pitchFamily="34" charset="-122"/>
+                <a:cs typeface="Helvetica Neue" pitchFamily="34" charset="-120"/>
+              </a:rPr>
+              <a:t>Same pure engine, proven deterministic on an arbitrary graph in scripts/check.mjs. They show the disruption; we show the signed, auditable decision.</a:t>
+            </a:r>
+            <a:endParaRPr lang="en-US" sz="850" dirty="0"/>
           </a:p>
         </p:txBody>
       </p:sp>

--- a/TRINETRA_Deck_Soft.pptx
+++ b/TRINETRA_Deck_Soft.pptx
@@ -5383,7 +5383,7 @@
                 <a:ea typeface="Helvetica Neue" pitchFamily="34" charset="-122"/>
                 <a:cs typeface="Helvetica Neue" pitchFamily="34" charset="-120"/>
               </a:rPr>
-              <a:t>One screen, one engine: signals → exposure-graph re-score → machine-generated option cards → charter debate → hash-chained audit. 100% offline.</a:t>
+              <a:t>One screen, one engine: signals → exposure-graph re-score → machine-generated option cards → charter debate → hash-chained audit. Live LLM at the edges; deterministic core runs offline.</a:t>
             </a:r>
             <a:endParaRPr lang="en-US" sz="850" dirty="0"/>
           </a:p>
@@ -7150,7 +7150,7 @@
                 <a:ea typeface="Helvetica Neue" pitchFamily="34" charset="-122"/>
                 <a:cs typeface="Helvetica Neue" pitchFamily="34" charset="-120"/>
               </a:rPr>
-              <a:t>LLM text is cached at build time — the demo runs in airplane mode. Per-refinery inventories are modeled (S), and we say so.</a:t>
+              <a:t>The LLM runs LIVE (NVIDIA, via a key-holding edge worker) and every completion is recorded for replay; airplane mode falls back to the build-time cache. Per-refinery inventories are modeled (S), and we say so.</a:t>
             </a:r>
             <a:endParaRPr lang="en-US" sz="1050" dirty="0"/>
           </a:p>
@@ -8585,7 +8585,7 @@
                 <a:ea typeface="Helvetica Neue" pitchFamily="34" charset="-122"/>
                 <a:cs typeface="Helvetica Neue" pitchFamily="34" charset="-120"/>
               </a:rPr>
-              <a:t>cached LLM</a:t>
+              <a:t>LIVE LLM</a:t>
             </a:r>
             <a:endParaRPr lang="en-US" sz="900" dirty="0"/>
           </a:p>
@@ -9005,7 +9005,7 @@
                 <a:ea typeface="Helvetica Neue" pitchFamily="34" charset="-122"/>
                 <a:cs typeface="Helvetica Neue" pitchFamily="34" charset="-120"/>
               </a:rPr>
-              <a:t>solid = deterministic       proposer text is cached at build time (the only LLM)</a:t>
+              <a:t>solid = deterministic   ·   proposer prose is LIVE (NVIDIA via a key-holding edge worker), recorded for replay; cache is the airplane-mode fallback</a:t>
             </a:r>
             <a:endParaRPr lang="en-US" sz="1000" dirty="0"/>
           </a:p>
@@ -9530,7 +9530,7 @@
                 <a:ea typeface="Helvetica Neue" pitchFamily="34" charset="-122"/>
                 <a:cs typeface="Helvetica Neue" pitchFamily="34" charset="-120"/>
               </a:rPr>
-              <a:t>cached offline; only prose may vary</a:t>
+              <a:t>live at the edges, recorded for replay — only prose may vary</a:t>
             </a:r>
             <a:endParaRPr lang="en-US" sz="1200" dirty="0"/>
           </a:p>
@@ -10718,7 +10718,7 @@
         <p:spPr>
           <a:xfrm>
             <a:off x="502920" y="3246120"/>
-            <a:ext cx="11155680" cy="274320"/>
+            <a:ext cx="7223760" cy="274320"/>
           </a:xfrm>
           <a:prstGeom prst="rect">
             <a:avLst/>
@@ -10742,7 +10742,7 @@
                 <a:ea typeface="Helvetica Neue" pitchFamily="34" charset="-122"/>
                 <a:cs typeface="Helvetica Neue" pitchFamily="34" charset="-120"/>
               </a:rPr>
-              <a:t>THE GATE, LIVE — a hallucinated Brent 9000, a 200-day floor, a made-up grade, all rejected before scoring:</a:t>
+              <a:t>THE GATE, LIVE — a hallucinated Brent 9000 and a made-up grade, rejected before scoring:</a:t>
             </a:r>
             <a:endParaRPr lang="en-US" sz="1100" dirty="0"/>
           </a:p>
@@ -10750,14 +10750,53 @@
       </p:sp>
       <p:sp>
         <p:nvSpPr>
-          <p:cNvPr id="38" name="Shape 36"/>
+          <p:cNvPr id="38" name="Text 36"/>
+          <p:cNvSpPr/>
+          <p:nvPr/>
+        </p:nvSpPr>
+        <p:spPr>
+          <a:xfrm>
+            <a:off x="7909560" y="3246120"/>
+            <a:ext cx="3749040" cy="274320"/>
+          </a:xfrm>
+          <a:prstGeom prst="rect">
+            <a:avLst/>
+          </a:prstGeom>
+          <a:noFill/>
+          <a:ln/>
+        </p:spPr>
+        <p:txBody>
+          <a:bodyPr wrap="square" lIns="0" tIns="0" rIns="0" bIns="0" rtlCol="0" anchor="t"/>
+          <a:lstStyle/>
+          <a:p>
+            <a:pPr algn="l" indent="0" marL="0">
+              <a:buNone/>
+            </a:pPr>
+            <a:r>
+              <a:rPr lang="en-US" sz="1100" b="1" spc="50" kern="0" dirty="0">
+                <a:solidFill>
+                  <a:srgbClr val="4FBF87"/>
+                </a:solidFill>
+                <a:latin typeface="Helvetica Neue" pitchFamily="34" charset="0"/>
+                <a:ea typeface="Helvetica Neue" pitchFamily="34" charset="-122"/>
+                <a:cs typeface="Helvetica Neue" pitchFamily="34" charset="-120"/>
+              </a:rPr>
+              <a:t>THE MODEL, LIVE ✦ — NVIDIA, on every update:</a:t>
+            </a:r>
+            <a:endParaRPr lang="en-US" sz="1100" dirty="0"/>
+          </a:p>
+        </p:txBody>
+      </p:sp>
+      <p:sp>
+        <p:nvSpPr>
+          <p:cNvPr id="39" name="Shape 37"/>
           <p:cNvSpPr/>
           <p:nvPr/>
         </p:nvSpPr>
         <p:spPr>
           <a:xfrm>
             <a:off x="502920" y="3566160"/>
-            <a:ext cx="11155680" cy="1373522"/>
+            <a:ext cx="7223760" cy="889412"/>
           </a:xfrm>
           <a:prstGeom prst="rect">
             <a:avLst/>
@@ -10777,7 +10816,7 @@
       </p:sp>
       <p:pic>
         <p:nvPicPr>
-          <p:cNvPr id="39" name="Image 0" descr="/private/tmp/claude-501/-Users-aman-Downloads-ET-Hackathon/ab60fbe1-6f03-48e5-aa7b-8b187ce1082a/scratchpad/deck-assets/ai_gate.png">    </p:cNvPr>
+          <p:cNvPr id="40" name="Image 0" descr="/private/tmp/claude-501/-Users-aman-Downloads-ET-Hackathon/ab60fbe1-6f03-48e5-aa7b-8b187ce1082a/scratchpad/deck-assets/ai_gate.png">    </p:cNvPr>
           <p:cNvPicPr>
             <a:picLocks noChangeAspect="1"/>
           </p:cNvPicPr>
@@ -10792,7 +10831,7 @@
         <p:spPr>
           <a:xfrm>
             <a:off x="502920" y="3566160"/>
-            <a:ext cx="11155680" cy="1373522"/>
+            <a:ext cx="7223760" cy="889412"/>
           </a:xfrm>
           <a:prstGeom prst="rect">
             <a:avLst/>
@@ -10801,14 +10840,14 @@
       </p:pic>
       <p:sp>
         <p:nvSpPr>
-          <p:cNvPr id="40" name="Shape 37"/>
+          <p:cNvPr id="41" name="Shape 38"/>
           <p:cNvSpPr/>
           <p:nvPr/>
         </p:nvSpPr>
         <p:spPr>
           <a:xfrm>
             <a:off x="502920" y="3566160"/>
-            <a:ext cx="11155680" cy="1373522"/>
+            <a:ext cx="7223760" cy="889412"/>
           </a:xfrm>
           <a:prstGeom prst="rect">
             <a:avLst/>
@@ -10823,13 +10862,125 @@
       </p:sp>
       <p:sp>
         <p:nvSpPr>
-          <p:cNvPr id="41" name="Shape 38"/>
-          <p:cNvSpPr/>
-          <p:nvPr/>
-        </p:nvSpPr>
-        <p:spPr>
-          <a:xfrm>
-            <a:off x="502920" y="5122562"/>
+          <p:cNvPr id="42" name="Shape 39"/>
+          <p:cNvSpPr/>
+          <p:nvPr/>
+        </p:nvSpPr>
+        <p:spPr>
+          <a:xfrm>
+            <a:off x="7909560" y="3566160"/>
+            <a:ext cx="3749040" cy="1051391"/>
+          </a:xfrm>
+          <a:prstGeom prst="rect">
+            <a:avLst/>
+          </a:prstGeom>
+          <a:solidFill>
+            <a:srgbClr val="000000"/>
+          </a:solidFill>
+          <a:ln/>
+          <a:effectLst>
+            <a:outerShdw sx="100000" sy="100000" kx="0" ky="0" algn="bl" rotWithShape="0" blurRad="127000" dist="38100" dir="8100000">
+              <a:srgbClr val="000000">
+                <a:alpha val="45000"/>
+              </a:srgbClr>
+            </a:outerShdw>
+          </a:effectLst>
+        </p:spPr>
+      </p:sp>
+      <p:pic>
+        <p:nvPicPr>
+          <p:cNvPr id="43" name="Image 1" descr="/private/tmp/claude-501/-Users-aman-Downloads-ET-Hackathon/ab60fbe1-6f03-48e5-aa7b-8b187ce1082a/scratchpad/deck-assets/live_card.png">    </p:cNvPr>
+          <p:cNvPicPr>
+            <a:picLocks noChangeAspect="1"/>
+          </p:cNvPicPr>
+          <p:nvPr/>
+        </p:nvPicPr>
+        <p:blipFill>
+          <a:blip r:embed="rId2"/>
+          <a:stretch>
+            <a:fillRect/>
+          </a:stretch>
+        </p:blipFill>
+        <p:spPr>
+          <a:xfrm>
+            <a:off x="7909560" y="3566160"/>
+            <a:ext cx="3749040" cy="1051391"/>
+          </a:xfrm>
+          <a:prstGeom prst="rect">
+            <a:avLst/>
+          </a:prstGeom>
+        </p:spPr>
+      </p:pic>
+      <p:sp>
+        <p:nvSpPr>
+          <p:cNvPr id="44" name="Shape 40"/>
+          <p:cNvSpPr/>
+          <p:nvPr/>
+        </p:nvSpPr>
+        <p:spPr>
+          <a:xfrm>
+            <a:off x="7909560" y="3566160"/>
+            <a:ext cx="3749040" cy="1051391"/>
+          </a:xfrm>
+          <a:prstGeom prst="rect">
+            <a:avLst/>
+          </a:prstGeom>
+          <a:ln w="19050">
+            <a:solidFill>
+              <a:srgbClr val="4FBF87"/>
+            </a:solidFill>
+            <a:prstDash val="solid"/>
+          </a:ln>
+        </p:spPr>
+      </p:sp>
+      <p:sp>
+        <p:nvSpPr>
+          <p:cNvPr id="45" name="Text 41"/>
+          <p:cNvSpPr/>
+          <p:nvPr/>
+        </p:nvSpPr>
+        <p:spPr>
+          <a:xfrm>
+            <a:off x="7909560" y="4663271"/>
+            <a:ext cx="3749040" cy="256032"/>
+          </a:xfrm>
+          <a:prstGeom prst="rect">
+            <a:avLst/>
+          </a:prstGeom>
+          <a:noFill/>
+          <a:ln/>
+        </p:spPr>
+        <p:txBody>
+          <a:bodyPr wrap="square" lIns="0" tIns="0" rIns="0" bIns="0" rtlCol="0" anchor="t"/>
+          <a:lstStyle/>
+          <a:p>
+            <a:pPr algn="l" indent="0" marL="0">
+              <a:buNone/>
+            </a:pPr>
+            <a:r>
+              <a:rPr lang="en-US" sz="900" i="1" dirty="0">
+                <a:solidFill>
+                  <a:srgbClr val="8A93A0"/>
+                </a:solidFill>
+                <a:latin typeface="Helvetica Neue" pitchFamily="34" charset="0"/>
+                <a:ea typeface="Helvetica Neue" pitchFamily="34" charset="-122"/>
+                <a:cs typeface="Helvetica Neue" pitchFamily="34" charset="-120"/>
+              </a:rPr>
+              <a:t>live Llama-3.3-70B rationale, recorded for replay — captured from the app</a:t>
+            </a:r>
+            <a:endParaRPr lang="en-US" sz="900" dirty="0"/>
+          </a:p>
+        </p:txBody>
+      </p:sp>
+      <p:sp>
+        <p:nvSpPr>
+          <p:cNvPr id="46" name="Shape 42"/>
+          <p:cNvSpPr/>
+          <p:nvPr/>
+        </p:nvSpPr>
+        <p:spPr>
+          <a:xfrm>
+            <a:off x="502920" y="4965023"/>
             <a:ext cx="11155680" cy="1170432"/>
           </a:xfrm>
           <a:prstGeom prst="rect">
@@ -10848,13 +10999,13 @@
       </p:sp>
       <p:sp>
         <p:nvSpPr>
-          <p:cNvPr id="42" name="Shape 39"/>
-          <p:cNvSpPr/>
-          <p:nvPr/>
-        </p:nvSpPr>
-        <p:spPr>
-          <a:xfrm>
-            <a:off x="502920" y="5122562"/>
+          <p:cNvPr id="47" name="Shape 43"/>
+          <p:cNvSpPr/>
+          <p:nvPr/>
+        </p:nvSpPr>
+        <p:spPr>
+          <a:xfrm>
+            <a:off x="502920" y="4965023"/>
             <a:ext cx="64008" cy="1170432"/>
           </a:xfrm>
           <a:prstGeom prst="rect">
@@ -10868,13 +11019,13 @@
       </p:sp>
       <p:sp>
         <p:nvSpPr>
-          <p:cNvPr id="43" name="Text 40"/>
-          <p:cNvSpPr/>
-          <p:nvPr/>
-        </p:nvSpPr>
-        <p:spPr>
-          <a:xfrm>
-            <a:off x="777240" y="5250578"/>
+          <p:cNvPr id="48" name="Text 44"/>
+          <p:cNvSpPr/>
+          <p:nvPr/>
+        </p:nvSpPr>
+        <p:spPr>
+          <a:xfrm>
+            <a:off x="777240" y="5093039"/>
             <a:ext cx="10698480" cy="365760"/>
           </a:xfrm>
           <a:prstGeom prst="rect">
@@ -10899,7 +11050,7 @@
                 <a:ea typeface="Helvetica Neue" pitchFamily="34" charset="-122"/>
                 <a:cs typeface="Helvetica Neue" pitchFamily="34" charset="-120"/>
               </a:rPr>
-              <a:t>AI for sense-making and constitutional auditing.  Deterministic logic for scoring.  Humans for final approval.</a:t>
+              <a:t>A live model makes the call. The record replays byte-identically. A human signs.</a:t>
             </a:r>
             <a:endParaRPr lang="en-US" sz="1500" dirty="0"/>
           </a:p>
@@ -10907,13 +11058,13 @@
       </p:sp>
       <p:sp>
         <p:nvSpPr>
-          <p:cNvPr id="44" name="Text 41"/>
-          <p:cNvSpPr/>
-          <p:nvPr/>
-        </p:nvSpPr>
-        <p:spPr>
-          <a:xfrm>
-            <a:off x="777240" y="5625482"/>
+          <p:cNvPr id="49" name="Text 45"/>
+          <p:cNvSpPr/>
+          <p:nvPr/>
+        </p:nvSpPr>
+        <p:spPr>
+          <a:xfrm>
+            <a:off x="777240" y="5467943"/>
             <a:ext cx="10698480" cy="621792"/>
           </a:xfrm>
           <a:prstGeom prst="rect">
@@ -10941,7 +11092,7 @@
                 <a:ea typeface="Helvetica Neue" pitchFamily="34" charset="-122"/>
                 <a:cs typeface="Helvetica Neue" pitchFamily="34" charset="-120"/>
               </a:rPr>
-              <a:t>Extraction, every gate rejection, scoring, the AI audit, and the human sign-off are each appended to the same SHA-256 hash chain — byte-identical on replay, offline. The LLM is asked for strict JSON and told never to score; anything it fabricates is dropped with a reason and never reaches the engine.</a:t>
+              <a:t>The LLM runs LIVE on every decision-state change — NVIDIA Llama-3.3-70B through a key-holding Cloudflare Worker; the browser never sees a key. Every completion is RECORDED and replays byte-identically; the validation gate still drops anything fabricated before it can touch a score; scoring stays deterministic and offline-checkable.</a:t>
             </a:r>
             <a:endParaRPr lang="en-US" sz="1150" dirty="0"/>
           </a:p>
@@ -10949,7 +11100,7 @@
       </p:sp>
       <p:sp>
         <p:nvSpPr>
-          <p:cNvPr id="45" name="Text 42"/>
+          <p:cNvPr id="50" name="Text 46"/>
           <p:cNvSpPr/>
           <p:nvPr/>
         </p:nvSpPr>
@@ -10980,7 +11131,7 @@
                 <a:ea typeface="Helvetica Neue" pitchFamily="34" charset="-122"/>
                 <a:cs typeface="Helvetica Neue" pitchFamily="34" charset="-120"/>
               </a:rPr>
-              <a:t>Given the validated facts, scoring and its audit hashes are byte-identical — the guardrail is what makes an LLM safe for intake. Try it: AI ASSIST ✦ → “⚠ Hallucination test.”</a:t>
+              <a:t>AI for sense-making and auditing · deterministic logic for scoring · humans for approval. Try it live: AI ASSIST ✦ → “⚠ Hallucination test.”</a:t>
             </a:r>
             <a:endParaRPr lang="en-US" sz="850" dirty="0"/>
           </a:p>

--- a/TRINETRA_Deck_Soft.pptx
+++ b/TRINETRA_Deck_Soft.pptx
@@ -4967,6 +4967,45 @@
         </p:nvSpPr>
         <p:spPr>
           <a:xfrm>
+            <a:off x="6492240" y="5175504"/>
+            <a:ext cx="5029200" cy="219456"/>
+          </a:xfrm>
+          <a:prstGeom prst="rect">
+            <a:avLst/>
+          </a:prstGeom>
+          <a:noFill/>
+          <a:ln/>
+        </p:spPr>
+        <p:txBody>
+          <a:bodyPr wrap="square" lIns="0" tIns="0" rIns="0" bIns="0" rtlCol="0" anchor="t"/>
+          <a:lstStyle/>
+          <a:p>
+            <a:pPr algn="l" indent="0" marL="0">
+              <a:buNone/>
+            </a:pPr>
+            <a:r>
+              <a:rPr lang="en-US" sz="900" i="1" dirty="0">
+                <a:solidFill>
+                  <a:srgbClr val="8A93A0"/>
+                </a:solidFill>
+                <a:latin typeface="Helvetica Neue" pitchFamily="34" charset="0"/>
+                <a:ea typeface="Helvetica Neue" pitchFamily="34" charset="-122"/>
+                <a:cs typeface="Helvetica Neue" pitchFamily="34" charset="-120"/>
+              </a:rPr>
+              <a:t>Targets: IOC Intl Trade Directorate · RIL Jamnagar crude desk · BPCL risk cell</a:t>
+            </a:r>
+            <a:endParaRPr lang="en-US" sz="900" dirty="0"/>
+          </a:p>
+        </p:txBody>
+      </p:sp>
+      <p:sp>
+        <p:nvSpPr>
+          <p:cNvPr id="35" name="Text 33"/>
+          <p:cNvSpPr/>
+          <p:nvPr/>
+        </p:nvSpPr>
+        <p:spPr>
+          <a:xfrm>
             <a:off x="6309360" y="5440680"/>
             <a:ext cx="2011680" cy="365760"/>
           </a:xfrm>
@@ -5000,7 +5039,7 @@
       </p:sp>
       <p:sp>
         <p:nvSpPr>
-          <p:cNvPr id="35" name="Shape 33"/>
+          <p:cNvPr id="36" name="Shape 34"/>
           <p:cNvSpPr/>
           <p:nvPr/>
         </p:nvSpPr>
@@ -5027,7 +5066,7 @@
       </p:sp>
       <p:pic>
         <p:nvPicPr>
-          <p:cNvPr id="36" name="Image 0" descr="/private/tmp/claude-501/-Users-aman-Downloads-ET-Hackathon/ab60fbe1-6f03-48e5-aa7b-8b187ce1082a/scratchpad/deck-assets/cost_strip.png">    </p:cNvPr>
+          <p:cNvPr id="37" name="Image 0" descr="/private/tmp/claude-501/-Users-aman-Downloads-ET-Hackathon/ab60fbe1-6f03-48e5-aa7b-8b187ce1082a/scratchpad/deck-assets/cost_strip.png">    </p:cNvPr>
           <p:cNvPicPr>
             <a:picLocks noChangeAspect="1"/>
           </p:cNvPicPr>
@@ -5051,7 +5090,7 @@
       </p:pic>
       <p:sp>
         <p:nvSpPr>
-          <p:cNvPr id="37" name="Text 34"/>
+          <p:cNvPr id="38" name="Text 35"/>
           <p:cNvSpPr/>
           <p:nvPr/>
         </p:nvSpPr>
@@ -11825,7 +11864,7 @@
                 <a:ea typeface="Helvetica Neue" pitchFamily="34" charset="-122"/>
                 <a:cs typeface="Helvetica Neue" pitchFamily="34" charset="-120"/>
               </a:rPr>
-              <a:t>Honest footer: live production feeds (Kpler / Spire) are adapter stubs today — marked “production license.”</a:t>
+              <a:t>Honest footer: live feeds (Kpler / Spire) are stubs behind the same 3-method FeedAdapter interface as the replay (src/engine/feeds.ts) — “production license.”</a:t>
             </a:r>
             <a:endParaRPr lang="en-US" sz="1050" dirty="0"/>
           </a:p>

--- a/TRINETRA_Deck_Soft.pptx
+++ b/TRINETRA_Deck_Soft.pptx
@@ -1966,7 +1966,7 @@
                 <a:ea typeface="Helvetica Neue" pitchFamily="34" charset="-122"/>
                 <a:cs typeface="Helvetica Neue" pitchFamily="34" charset="-120"/>
               </a:rPr>
-              <a:t>AI for sense-making and constitutional auditing · deterministic logic for scoring · humans for final approval. Every step hash-chained, byte-identical, offline.</a:t>
+              <a:t>AI for sense-making and constitutional auditing · deterministic logic for scoring · humans for final approval. A live model makes the call; the record replays byte-identically.</a:t>
             </a:r>
             <a:endParaRPr lang="en-US" sz="1400" dirty="0"/>
           </a:p>
@@ -2594,7 +2594,7 @@
                 <a:ea typeface="Helvetica Neue" pitchFamily="34" charset="-122"/>
                 <a:cs typeface="Helvetica Neue" pitchFamily="34" charset="-120"/>
               </a:rPr>
-              <a:t>ET AI Hackathon 2026  ·  100% client-side, offline  ·  deterministic, byte-identical replay  ·  zero-LLM critic  ·  live on-screen decision clock</a:t>
+              <a:t>ET AI Hackathon 2026  ·  live NVIDIA LLM at the edges  ·  deterministic, byte-identical replay  ·  zero-LLM critic  ·  live on-screen decision clock</a:t>
             </a:r>
             <a:endParaRPr lang="en-US" sz="850" dirty="0"/>
           </a:p>
